--- a/python-course-ppt/逐节课件/Python讲授课件-单元08.pptx
+++ b/python-course-ppt/逐节课件/Python讲授课件-单元08.pptx
@@ -240,1710 +240,6 @@
     </a:lvl9pPr>
   </p:notesStyle>
 </p:notesMaster>
-</file>
-
-<file path=ppt/notesSlides/notesSlide1.xml><?xml version="1.0" encoding="utf-8"?>
-<p:notes xmlns:a="http://schemas.openxmlformats.org/drawingml/2006/main" xmlns:p="http://schemas.openxmlformats.org/presentationml/2006/main" xmlns:r="http://schemas.openxmlformats.org/officeDocument/2006/relationships">
-  <p:cSld>
-    <p:spTree>
-      <p:nvGrpSpPr>
-        <p:cNvPr id="1" name=""/>
-        <p:cNvGrpSpPr/>
-        <p:nvPr/>
-      </p:nvGrpSpPr>
-      <p:grpSpPr>
-        <a:xfrm>
-          <a:off x="0" y="0"/>
-          <a:ext cx="0" cy="0"/>
-          <a:chOff x="0" y="0"/>
-          <a:chExt cx="0" cy="0"/>
-        </a:xfrm>
-      </p:grpSpPr>
-      <p:sp>
-        <p:nvSpPr>
-          <p:cNvPr id="2" name="讲课提示"/>
-          <p:cNvSpPr txBox="1"/>
-          <p:nvPr/>
-        </p:nvSpPr>
-        <p:spPr>
-          <a:xfrm>
-            <a:off x="457200" y="457200"/>
-            <a:ext cx="6858000" cy="4800600"/>
-          </a:xfrm>
-          <a:prstGeom prst="rect">
-            <a:avLst/>
-          </a:prstGeom>
-        </p:spPr>
-        <p:txBody>
-          <a:bodyPr wrap="square"/>
-          <a:lstStyle/>
-          <a:p>
-            <a:r>
-              <a:rPr lang="zh-CN" dirty="0"/>
-              <a:t>单元 8 · 单元 8 · 类</a:t>
-            </a:r>
-          </a:p>
-          <a:p>
-            <a:r>
-              <a:rPr lang="zh-CN" dirty="0"/>
-              <a:t/>
-            </a:r>
-          </a:p>
-          <a:p>
-            <a:r>
-              <a:rPr lang="zh-CN" dirty="0"/>
-              <a:t>本单元包含以下课节：</a:t>
-            </a:r>
-          </a:p>
-          <a:p>
-            <a:r>
-              <a:rPr lang="zh-CN" dirty="0"/>
-              <a:t>· 第 40 节 类、实例与 self</a:t>
-            </a:r>
-          </a:p>
-          <a:p>
-            <a:r>
-              <a:rPr lang="zh-CN" dirty="0"/>
-              <a:t>· 第 41 节 __init__、属性方法与 __str__</a:t>
-            </a:r>
-          </a:p>
-          <a:p>
-            <a:r>
-              <a:rPr lang="zh-CN" dirty="0"/>
-              <a:t>· 第 42 节 继承与方法重写</a:t>
-            </a:r>
-          </a:p>
-          <a:p>
-            <a:r>
-              <a:rPr lang="zh-CN" dirty="0"/>
-              <a:t>· 第 43 节 类的组合与示例串讲</a:t>
-            </a:r>
-          </a:p>
-          <a:p>
-            <a:r>
-              <a:rPr lang="zh-CN" dirty="0"/>
-              <a:t>· 第 44 节 动手实战与答案讲评</a:t>
-            </a:r>
-          </a:p>
-          <a:p>
-            <a:r>
-              <a:rPr lang="zh-CN" dirty="0"/>
-              <a:t>· 第 45 节 ★ 六个常见错误逐条自查</a:t>
-            </a:r>
-          </a:p>
-          <a:p>
-            <a:r>
-              <a:rPr lang="zh-CN" dirty="0"/>
-              <a:t>· 第 46 节 单元 8 验收复盘</a:t>
-            </a:r>
-          </a:p>
-          <a:p>
-            <a:r>
-              <a:rPr lang="zh-CN" dirty="0"/>
-              <a:t/>
-            </a:r>
-          </a:p>
-          <a:p>
-            <a:r>
-              <a:rPr lang="zh-CN" dirty="0"/>
-              <a:t>开场用 3 分钟讲清：这个单元学完能做出什么，最后会被关卡怎么验。</a:t>
-            </a:r>
-          </a:p>
-        </p:txBody>
-      </p:sp>
-    </p:spTree>
-  </p:cSld>
-  <p:clrMapOvr>
-    <a:masterClrMapping/>
-  </p:clrMapOvr>
-</p:notes>
-</file>
-
-<file path=ppt/notesSlides/notesSlide10.xml><?xml version="1.0" encoding="utf-8"?>
-<p:notes xmlns:a="http://schemas.openxmlformats.org/drawingml/2006/main" xmlns:p="http://schemas.openxmlformats.org/presentationml/2006/main" xmlns:r="http://schemas.openxmlformats.org/officeDocument/2006/relationships">
-  <p:cSld>
-    <p:spTree>
-      <p:nvGrpSpPr>
-        <p:cNvPr id="1" name=""/>
-        <p:cNvGrpSpPr/>
-        <p:nvPr/>
-      </p:nvGrpSpPr>
-      <p:grpSpPr>
-        <a:xfrm>
-          <a:off x="0" y="0"/>
-          <a:ext cx="0" cy="0"/>
-          <a:chOff x="0" y="0"/>
-          <a:chExt cx="0" cy="0"/>
-        </a:xfrm>
-      </p:grpSpPr>
-      <p:sp>
-        <p:nvSpPr>
-          <p:cNvPr id="2" name="讲课提示"/>
-          <p:cNvSpPr txBox="1"/>
-          <p:nvPr/>
-        </p:nvSpPr>
-        <p:spPr>
-          <a:xfrm>
-            <a:off x="457200" y="457200"/>
-            <a:ext cx="6858000" cy="4800600"/>
-          </a:xfrm>
-          <a:prstGeom prst="rect">
-            <a:avLst/>
-          </a:prstGeom>
-        </p:spPr>
-        <p:txBody>
-          <a:bodyPr wrap="square"/>
-          <a:lstStyle/>
-          <a:p>
-            <a:r>
-              <a:rPr lang="zh-CN" dirty="0"/>
-              <a:t>第 44 节 · 动手实战与答案讲评</a:t>
-            </a:r>
-          </a:p>
-          <a:p>
-            <a:r>
-              <a:rPr lang="zh-CN" dirty="0"/>
-              <a:t>单元 8 · 类 · W10</a:t>
-            </a:r>
-          </a:p>
-          <a:p>
-            <a:r>
-              <a:rPr lang="zh-CN" dirty="0"/>
-              <a:t/>
-            </a:r>
-          </a:p>
-          <a:p>
-            <a:r>
-              <a:rPr lang="zh-CN" dirty="0"/>
-              <a:t>学习目标：独立完成单元 8 练习，能自己设计一个类</a:t>
-            </a:r>
-          </a:p>
-          <a:p>
-            <a:r>
-              <a:rPr lang="zh-CN" dirty="0"/>
-              <a:t/>
-            </a:r>
-          </a:p>
-          <a:p>
-            <a:r>
-              <a:rPr lang="zh-CN" dirty="0"/>
-              <a:t>课堂实操（40 分钟，不看答案）：</a:t>
-            </a:r>
-          </a:p>
-          <a:p>
-            <a:r>
-              <a:rPr lang="zh-CN" dirty="0"/>
-              <a:t>· ★ 现场自建 3 个类：学生记录 / 购物车 / 银行账户</a:t>
-            </a:r>
-          </a:p>
-          <a:p>
-            <a:r>
-              <a:rPr lang="zh-CN" dirty="0"/>
-              <a:t>· 限时 30 分钟独立完成基础档</a:t>
-            </a:r>
-          </a:p>
-          <a:p>
-            <a:r>
-              <a:rPr lang="zh-CN" dirty="0"/>
-              <a:t/>
-            </a:r>
-          </a:p>
-          <a:p>
-            <a:r>
-              <a:rPr lang="zh-CN" dirty="0"/>
-              <a:t>课后作业：</a:t>
-            </a:r>
-          </a:p>
-          <a:p>
-            <a:r>
-              <a:rPr lang="zh-CN" dirty="0"/>
-              <a:t>· 完成题库 L4 全部 + 单元 8 进阶档</a:t>
-            </a:r>
-          </a:p>
-          <a:p>
-            <a:r>
-              <a:rPr lang="zh-CN" dirty="0"/>
-              <a:t>· 产出：3 个自建类（含继承）</a:t>
-            </a:r>
-          </a:p>
-          <a:p>
-            <a:r>
-              <a:rPr lang="zh-CN" dirty="0"/>
-              <a:t/>
-            </a:r>
-          </a:p>
-          <a:p>
-            <a:r>
-              <a:rPr lang="zh-CN" dirty="0"/>
-              <a:t>节奏：讲 20 分钟 → 学员自己敲 40 分钟（不看答案）→ 对讲评自查 20 分钟 → 写作业 10 分钟。</a:t>
-            </a:r>
-          </a:p>
-        </p:txBody>
-      </p:sp>
-    </p:spTree>
-  </p:cSld>
-  <p:clrMapOvr>
-    <a:masterClrMapping/>
-  </p:clrMapOvr>
-</p:notes>
-</file>
-
-<file path=ppt/notesSlides/notesSlide11.xml><?xml version="1.0" encoding="utf-8"?>
-<p:notes xmlns:a="http://schemas.openxmlformats.org/drawingml/2006/main" xmlns:p="http://schemas.openxmlformats.org/presentationml/2006/main" xmlns:r="http://schemas.openxmlformats.org/officeDocument/2006/relationships">
-  <p:cSld>
-    <p:spTree>
-      <p:nvGrpSpPr>
-        <p:cNvPr id="1" name=""/>
-        <p:cNvGrpSpPr/>
-        <p:nvPr/>
-      </p:nvGrpSpPr>
-      <p:grpSpPr>
-        <a:xfrm>
-          <a:off x="0" y="0"/>
-          <a:ext cx="0" cy="0"/>
-          <a:chOff x="0" y="0"/>
-          <a:chExt cx="0" cy="0"/>
-        </a:xfrm>
-      </p:grpSpPr>
-      <p:sp>
-        <p:nvSpPr>
-          <p:cNvPr id="2" name="讲课提示"/>
-          <p:cNvSpPr txBox="1"/>
-          <p:nvPr/>
-        </p:nvSpPr>
-        <p:spPr>
-          <a:xfrm>
-            <a:off x="457200" y="457200"/>
-            <a:ext cx="6858000" cy="4800600"/>
-          </a:xfrm>
-          <a:prstGeom prst="rect">
-            <a:avLst/>
-          </a:prstGeom>
-        </p:spPr>
-        <p:txBody>
-          <a:bodyPr wrap="square"/>
-          <a:lstStyle/>
-          <a:p>
-            <a:r>
-              <a:rPr lang="zh-CN" dirty="0"/>
-              <a:t>第 44 节 · 核心知识点：动手实战与答案讲评</a:t>
-            </a:r>
-          </a:p>
-          <a:p>
-            <a:r>
-              <a:rPr lang="zh-CN" dirty="0"/>
-              <a:t/>
-            </a:r>
-          </a:p>
-          <a:p>
-            <a:r>
-              <a:rPr lang="zh-CN" dirty="0"/>
-              <a:t>讲这一页时：先让学生说出上节课的结论，再逐块讲要点。</a:t>
-            </a:r>
-          </a:p>
-          <a:p>
-            <a:r>
-              <a:rPr lang="zh-CN" dirty="0"/>
-              <a:t>每讲完一块，问一句「这一步如果写错了，报错会长什么样？」——把错误提前讲。</a:t>
-            </a:r>
-          </a:p>
-          <a:p>
-            <a:r>
-              <a:rPr lang="zh-CN" dirty="0"/>
-              <a:t/>
-            </a:r>
-          </a:p>
-          <a:p>
-            <a:r>
-              <a:rPr lang="zh-CN" dirty="0"/>
-              <a:t>本节目标：独立完成单元 8 练习，能自己设计一个类</a:t>
-            </a:r>
-          </a:p>
-          <a:p>
-            <a:r>
-              <a:rPr lang="zh-CN" dirty="0"/>
-              <a:t/>
-            </a:r>
-          </a:p>
-          <a:p>
-            <a:r>
-              <a:rPr lang="zh-CN" dirty="0"/>
-              <a:t>看不到懂的地方，回讲义对应小节读一遍，再回来对着这页复述一次——能讲出来才算真懂。</a:t>
-            </a:r>
-          </a:p>
-        </p:txBody>
-      </p:sp>
-    </p:spTree>
-  </p:cSld>
-  <p:clrMapOvr>
-    <a:masterClrMapping/>
-  </p:clrMapOvr>
-</p:notes>
-</file>
-
-<file path=ppt/notesSlides/notesSlide12.xml><?xml version="1.0" encoding="utf-8"?>
-<p:notes xmlns:a="http://schemas.openxmlformats.org/drawingml/2006/main" xmlns:p="http://schemas.openxmlformats.org/presentationml/2006/main" xmlns:r="http://schemas.openxmlformats.org/officeDocument/2006/relationships">
-  <p:cSld>
-    <p:spTree>
-      <p:nvGrpSpPr>
-        <p:cNvPr id="1" name=""/>
-        <p:cNvGrpSpPr/>
-        <p:nvPr/>
-      </p:nvGrpSpPr>
-      <p:grpSpPr>
-        <a:xfrm>
-          <a:off x="0" y="0"/>
-          <a:ext cx="0" cy="0"/>
-          <a:chOff x="0" y="0"/>
-          <a:chExt cx="0" cy="0"/>
-        </a:xfrm>
-      </p:grpSpPr>
-      <p:sp>
-        <p:nvSpPr>
-          <p:cNvPr id="2" name="讲课提示"/>
-          <p:cNvSpPr txBox="1"/>
-          <p:nvPr/>
-        </p:nvSpPr>
-        <p:spPr>
-          <a:xfrm>
-            <a:off x="457200" y="457200"/>
-            <a:ext cx="6858000" cy="4800600"/>
-          </a:xfrm>
-          <a:prstGeom prst="rect">
-            <a:avLst/>
-          </a:prstGeom>
-        </p:spPr>
-        <p:txBody>
-          <a:bodyPr wrap="square"/>
-          <a:lstStyle/>
-          <a:p>
-            <a:r>
-              <a:rPr lang="zh-CN" dirty="0"/>
-              <a:t>第 45 节 · ★ 六个常见错误逐条自查</a:t>
-            </a:r>
-          </a:p>
-          <a:p>
-            <a:r>
-              <a:rPr lang="zh-CN" dirty="0"/>
-              <a:t>单元 8 · 类 · W10</a:t>
-            </a:r>
-          </a:p>
-          <a:p>
-            <a:r>
-              <a:rPr lang="zh-CN" dirty="0"/>
-              <a:t/>
-            </a:r>
-          </a:p>
-          <a:p>
-            <a:r>
-              <a:rPr lang="zh-CN" dirty="0"/>
-              <a:t>学习目标：能对照错误清单逐条自查，把类相关的坑全部避开</a:t>
-            </a:r>
-          </a:p>
-          <a:p>
-            <a:r>
-              <a:rPr lang="zh-CN" dirty="0"/>
-              <a:t/>
-            </a:r>
-          </a:p>
-          <a:p>
-            <a:r>
-              <a:rPr lang="zh-CN" dirty="0"/>
-              <a:t>课堂实操（40 分钟，不看答案）：</a:t>
-            </a:r>
-          </a:p>
-          <a:p>
-            <a:r>
-              <a:rPr lang="zh-CN" dirty="0"/>
-              <a:t>· 逐条现场制造并修复 6 个错误</a:t>
-            </a:r>
-          </a:p>
-          <a:p>
-            <a:r>
-              <a:rPr lang="zh-CN" dirty="0"/>
-              <a:t>· 重点讲透「方法忘记写 self」</a:t>
-            </a:r>
-          </a:p>
-          <a:p>
-            <a:r>
-              <a:rPr lang="zh-CN" dirty="0"/>
-              <a:t/>
-            </a:r>
-          </a:p>
-          <a:p>
-            <a:r>
-              <a:rPr lang="zh-CN" dirty="0"/>
-              <a:t>课后作业：</a:t>
-            </a:r>
-          </a:p>
-          <a:p>
-            <a:r>
-              <a:rPr lang="zh-CN" dirty="0"/>
-              <a:t>· 把 6 个错误各写一个最小复现</a:t>
-            </a:r>
-          </a:p>
-          <a:p>
-            <a:r>
-              <a:rPr lang="zh-CN" dirty="0"/>
-              <a:t/>
-            </a:r>
-          </a:p>
-          <a:p>
-            <a:r>
-              <a:rPr lang="zh-CN" dirty="0"/>
-              <a:t>节奏：讲 20 分钟 → 学员自己敲 40 分钟（不看答案）→ 对讲评自查 20 分钟 → 写作业 10 分钟。</a:t>
-            </a:r>
-          </a:p>
-        </p:txBody>
-      </p:sp>
-    </p:spTree>
-  </p:cSld>
-  <p:clrMapOvr>
-    <a:masterClrMapping/>
-  </p:clrMapOvr>
-</p:notes>
-</file>
-
-<file path=ppt/notesSlides/notesSlide13.xml><?xml version="1.0" encoding="utf-8"?>
-<p:notes xmlns:a="http://schemas.openxmlformats.org/drawingml/2006/main" xmlns:p="http://schemas.openxmlformats.org/presentationml/2006/main" xmlns:r="http://schemas.openxmlformats.org/officeDocument/2006/relationships">
-  <p:cSld>
-    <p:spTree>
-      <p:nvGrpSpPr>
-        <p:cNvPr id="1" name=""/>
-        <p:cNvGrpSpPr/>
-        <p:nvPr/>
-      </p:nvGrpSpPr>
-      <p:grpSpPr>
-        <a:xfrm>
-          <a:off x="0" y="0"/>
-          <a:ext cx="0" cy="0"/>
-          <a:chOff x="0" y="0"/>
-          <a:chExt cx="0" cy="0"/>
-        </a:xfrm>
-      </p:grpSpPr>
-      <p:sp>
-        <p:nvSpPr>
-          <p:cNvPr id="2" name="讲课提示"/>
-          <p:cNvSpPr txBox="1"/>
-          <p:nvPr/>
-        </p:nvSpPr>
-        <p:spPr>
-          <a:xfrm>
-            <a:off x="457200" y="457200"/>
-            <a:ext cx="6858000" cy="4800600"/>
-          </a:xfrm>
-          <a:prstGeom prst="rect">
-            <a:avLst/>
-          </a:prstGeom>
-        </p:spPr>
-        <p:txBody>
-          <a:bodyPr wrap="square"/>
-          <a:lstStyle/>
-          <a:p>
-            <a:r>
-              <a:rPr lang="zh-CN" dirty="0"/>
-              <a:t>第 45 节 · 核心知识点：★ 六个常见错误逐条自查</a:t>
-            </a:r>
-          </a:p>
-          <a:p>
-            <a:r>
-              <a:rPr lang="zh-CN" dirty="0"/>
-              <a:t/>
-            </a:r>
-          </a:p>
-          <a:p>
-            <a:r>
-              <a:rPr lang="zh-CN" dirty="0"/>
-              <a:t>讲这一页时：先让学生说出上节课的结论，再逐块讲要点。</a:t>
-            </a:r>
-          </a:p>
-          <a:p>
-            <a:r>
-              <a:rPr lang="zh-CN" dirty="0"/>
-              <a:t>每讲完一块，问一句「这一步如果写错了，报错会长什么样？」——把错误提前讲。</a:t>
-            </a:r>
-          </a:p>
-          <a:p>
-            <a:r>
-              <a:rPr lang="zh-CN" dirty="0"/>
-              <a:t/>
-            </a:r>
-          </a:p>
-          <a:p>
-            <a:r>
-              <a:rPr lang="zh-CN" dirty="0"/>
-              <a:t>本节目标：能对照错误清单逐条自查，把类相关的坑全部避开</a:t>
-            </a:r>
-          </a:p>
-          <a:p>
-            <a:r>
-              <a:rPr lang="zh-CN" dirty="0"/>
-              <a:t/>
-            </a:r>
-          </a:p>
-          <a:p>
-            <a:r>
-              <a:rPr lang="zh-CN" dirty="0"/>
-              <a:t>看不到懂的地方，回讲义对应小节读一遍，再回来对着这页复述一次——能讲出来才算真懂。</a:t>
-            </a:r>
-          </a:p>
-        </p:txBody>
-      </p:sp>
-    </p:spTree>
-  </p:cSld>
-  <p:clrMapOvr>
-    <a:masterClrMapping/>
-  </p:clrMapOvr>
-</p:notes>
-</file>
-
-<file path=ppt/notesSlides/notesSlide14.xml><?xml version="1.0" encoding="utf-8"?>
-<p:notes xmlns:a="http://schemas.openxmlformats.org/drawingml/2006/main" xmlns:p="http://schemas.openxmlformats.org/presentationml/2006/main" xmlns:r="http://schemas.openxmlformats.org/officeDocument/2006/relationships">
-  <p:cSld>
-    <p:spTree>
-      <p:nvGrpSpPr>
-        <p:cNvPr id="1" name=""/>
-        <p:cNvGrpSpPr/>
-        <p:nvPr/>
-      </p:nvGrpSpPr>
-      <p:grpSpPr>
-        <a:xfrm>
-          <a:off x="0" y="0"/>
-          <a:ext cx="0" cy="0"/>
-          <a:chOff x="0" y="0"/>
-          <a:chExt cx="0" cy="0"/>
-        </a:xfrm>
-      </p:grpSpPr>
-      <p:sp>
-        <p:nvSpPr>
-          <p:cNvPr id="2" name="讲课提示"/>
-          <p:cNvSpPr txBox="1"/>
-          <p:nvPr/>
-        </p:nvSpPr>
-        <p:spPr>
-          <a:xfrm>
-            <a:off x="457200" y="457200"/>
-            <a:ext cx="6858000" cy="4800600"/>
-          </a:xfrm>
-          <a:prstGeom prst="rect">
-            <a:avLst/>
-          </a:prstGeom>
-        </p:spPr>
-        <p:txBody>
-          <a:bodyPr wrap="square"/>
-          <a:lstStyle/>
-          <a:p>
-            <a:r>
-              <a:rPr lang="zh-CN" dirty="0"/>
-              <a:t>第 46 节 · 单元 8 验收复盘</a:t>
-            </a:r>
-          </a:p>
-          <a:p>
-            <a:r>
-              <a:rPr lang="zh-CN" dirty="0"/>
-              <a:t>单元 8 · 类 · W10</a:t>
-            </a:r>
-          </a:p>
-          <a:p>
-            <a:r>
-              <a:rPr lang="zh-CN" dirty="0"/>
-              <a:t/>
-            </a:r>
-          </a:p>
-          <a:p>
-            <a:r>
-              <a:rPr lang="zh-CN" dirty="0"/>
-              <a:t>学习目标：确认类、实例、继承、重写、组合都过关</a:t>
-            </a:r>
-          </a:p>
-          <a:p>
-            <a:r>
-              <a:rPr lang="zh-CN" dirty="0"/>
-              <a:t/>
-            </a:r>
-          </a:p>
-          <a:p>
-            <a:r>
-              <a:rPr lang="zh-CN" dirty="0"/>
-              <a:t>课堂实操（40 分钟，不看答案）：</a:t>
-            </a:r>
-          </a:p>
-          <a:p>
-            <a:r>
-              <a:rPr lang="zh-CN" dirty="0"/>
-              <a:t>· 逐条打勾验收自测</a:t>
-            </a:r>
-          </a:p>
-          <a:p>
-            <a:r>
-              <a:rPr lang="zh-CN" dirty="0"/>
-              <a:t>· 现场手写一个含继承的类</a:t>
-            </a:r>
-          </a:p>
-          <a:p>
-            <a:r>
-              <a:rPr lang="zh-CN" dirty="0"/>
-              <a:t/>
-            </a:r>
-          </a:p>
-          <a:p>
-            <a:r>
-              <a:rPr lang="zh-CN" dirty="0"/>
-              <a:t>课后作业：</a:t>
-            </a:r>
-          </a:p>
-          <a:p>
-            <a:r>
-              <a:rPr lang="zh-CN" dirty="0"/>
-              <a:t>· 完成本单元小结与产出检查</a:t>
-            </a:r>
-          </a:p>
-          <a:p>
-            <a:r>
-              <a:rPr lang="zh-CN" dirty="0"/>
-              <a:t/>
-            </a:r>
-          </a:p>
-          <a:p>
-            <a:r>
-              <a:rPr lang="zh-CN" dirty="0"/>
-              <a:t>节奏：讲 20 分钟 → 学员自己敲 40 分钟（不看答案）→ 对讲评自查 20 分钟 → 写作业 10 分钟。</a:t>
-            </a:r>
-          </a:p>
-        </p:txBody>
-      </p:sp>
-    </p:spTree>
-  </p:cSld>
-  <p:clrMapOvr>
-    <a:masterClrMapping/>
-  </p:clrMapOvr>
-</p:notes>
-</file>
-
-<file path=ppt/notesSlides/notesSlide15.xml><?xml version="1.0" encoding="utf-8"?>
-<p:notes xmlns:a="http://schemas.openxmlformats.org/drawingml/2006/main" xmlns:p="http://schemas.openxmlformats.org/presentationml/2006/main" xmlns:r="http://schemas.openxmlformats.org/officeDocument/2006/relationships">
-  <p:cSld>
-    <p:spTree>
-      <p:nvGrpSpPr>
-        <p:cNvPr id="1" name=""/>
-        <p:cNvGrpSpPr/>
-        <p:nvPr/>
-      </p:nvGrpSpPr>
-      <p:grpSpPr>
-        <a:xfrm>
-          <a:off x="0" y="0"/>
-          <a:ext cx="0" cy="0"/>
-          <a:chOff x="0" y="0"/>
-          <a:chExt cx="0" cy="0"/>
-        </a:xfrm>
-      </p:grpSpPr>
-      <p:sp>
-        <p:nvSpPr>
-          <p:cNvPr id="2" name="讲课提示"/>
-          <p:cNvSpPr txBox="1"/>
-          <p:nvPr/>
-        </p:nvSpPr>
-        <p:spPr>
-          <a:xfrm>
-            <a:off x="457200" y="457200"/>
-            <a:ext cx="6858000" cy="4800600"/>
-          </a:xfrm>
-          <a:prstGeom prst="rect">
-            <a:avLst/>
-          </a:prstGeom>
-        </p:spPr>
-        <p:txBody>
-          <a:bodyPr wrap="square"/>
-          <a:lstStyle/>
-          <a:p>
-            <a:r>
-              <a:rPr lang="zh-CN" dirty="0"/>
-              <a:t>第 46 节 · 核心知识点：单元 8 验收复盘</a:t>
-            </a:r>
-          </a:p>
-          <a:p>
-            <a:r>
-              <a:rPr lang="zh-CN" dirty="0"/>
-              <a:t/>
-            </a:r>
-          </a:p>
-          <a:p>
-            <a:r>
-              <a:rPr lang="zh-CN" dirty="0"/>
-              <a:t>讲这一页时：先让学生说出上节课的结论，再逐块讲要点。</a:t>
-            </a:r>
-          </a:p>
-          <a:p>
-            <a:r>
-              <a:rPr lang="zh-CN" dirty="0"/>
-              <a:t>每讲完一块，问一句「这一步如果写错了，报错会长什么样？」——把错误提前讲。</a:t>
-            </a:r>
-          </a:p>
-          <a:p>
-            <a:r>
-              <a:rPr lang="zh-CN" dirty="0"/>
-              <a:t/>
-            </a:r>
-          </a:p>
-          <a:p>
-            <a:r>
-              <a:rPr lang="zh-CN" dirty="0"/>
-              <a:t>本节目标：确认类、实例、继承、重写、组合都过关</a:t>
-            </a:r>
-          </a:p>
-          <a:p>
-            <a:r>
-              <a:rPr lang="zh-CN" dirty="0"/>
-              <a:t/>
-            </a:r>
-          </a:p>
-          <a:p>
-            <a:r>
-              <a:rPr lang="zh-CN" dirty="0"/>
-              <a:t>看不到懂的地方，回讲义对应小节读一遍，再回来对着这页复述一次——能讲出来才算真懂。</a:t>
-            </a:r>
-          </a:p>
-        </p:txBody>
-      </p:sp>
-    </p:spTree>
-  </p:cSld>
-  <p:clrMapOvr>
-    <a:masterClrMapping/>
-  </p:clrMapOvr>
-</p:notes>
-</file>
-
-<file path=ppt/notesSlides/notesSlide16.xml><?xml version="1.0" encoding="utf-8"?>
-<p:notes xmlns:a="http://schemas.openxmlformats.org/drawingml/2006/main" xmlns:p="http://schemas.openxmlformats.org/presentationml/2006/main" xmlns:r="http://schemas.openxmlformats.org/officeDocument/2006/relationships">
-  <p:cSld>
-    <p:spTree>
-      <p:nvGrpSpPr>
-        <p:cNvPr id="1" name=""/>
-        <p:cNvGrpSpPr/>
-        <p:nvPr/>
-      </p:nvGrpSpPr>
-      <p:grpSpPr>
-        <a:xfrm>
-          <a:off x="0" y="0"/>
-          <a:ext cx="0" cy="0"/>
-          <a:chOff x="0" y="0"/>
-          <a:chExt cx="0" cy="0"/>
-        </a:xfrm>
-      </p:grpSpPr>
-      <p:sp>
-        <p:nvSpPr>
-          <p:cNvPr id="2" name="讲课提示"/>
-          <p:cNvSpPr txBox="1"/>
-          <p:nvPr/>
-        </p:nvSpPr>
-        <p:spPr>
-          <a:xfrm>
-            <a:off x="457200" y="457200"/>
-            <a:ext cx="6858000" cy="4800600"/>
-          </a:xfrm>
-          <a:prstGeom prst="rect">
-            <a:avLst/>
-          </a:prstGeom>
-        </p:spPr>
-        <p:txBody>
-          <a:bodyPr wrap="square"/>
-          <a:lstStyle/>
-          <a:p>
-            <a:r>
-              <a:rPr lang="zh-CN" dirty="0"/>
-              <a:t>单元 8 小结 · 单元 8 · 小结</a:t>
-            </a:r>
-          </a:p>
-          <a:p>
-            <a:r>
-              <a:rPr lang="zh-CN" dirty="0"/>
-              <a:t/>
-            </a:r>
-          </a:p>
-          <a:p>
-            <a:r>
-              <a:rPr lang="zh-CN" dirty="0"/>
-              <a:t>收尾动作：让学生合上讲义，口述本单元三个最重要的结论；说不出来的，回对应课节。</a:t>
-            </a:r>
-          </a:p>
-          <a:p>
-            <a:r>
-              <a:rPr lang="zh-CN" dirty="0"/>
-              <a:t>然后当场勾一遍本单元课节的「已完成」，没打勾的进下一单元前补掉。</a:t>
-            </a:r>
-          </a:p>
-        </p:txBody>
-      </p:sp>
-    </p:spTree>
-  </p:cSld>
-  <p:clrMapOvr>
-    <a:masterClrMapping/>
-  </p:clrMapOvr>
-</p:notes>
-</file>
-
-<file path=ppt/notesSlides/notesSlide2.xml><?xml version="1.0" encoding="utf-8"?>
-<p:notes xmlns:a="http://schemas.openxmlformats.org/drawingml/2006/main" xmlns:p="http://schemas.openxmlformats.org/presentationml/2006/main" xmlns:r="http://schemas.openxmlformats.org/officeDocument/2006/relationships">
-  <p:cSld>
-    <p:spTree>
-      <p:nvGrpSpPr>
-        <p:cNvPr id="1" name=""/>
-        <p:cNvGrpSpPr/>
-        <p:nvPr/>
-      </p:nvGrpSpPr>
-      <p:grpSpPr>
-        <a:xfrm>
-          <a:off x="0" y="0"/>
-          <a:ext cx="0" cy="0"/>
-          <a:chOff x="0" y="0"/>
-          <a:chExt cx="0" cy="0"/>
-        </a:xfrm>
-      </p:grpSpPr>
-      <p:sp>
-        <p:nvSpPr>
-          <p:cNvPr id="2" name="讲课提示"/>
-          <p:cNvSpPr txBox="1"/>
-          <p:nvPr/>
-        </p:nvSpPr>
-        <p:spPr>
-          <a:xfrm>
-            <a:off x="457200" y="457200"/>
-            <a:ext cx="6858000" cy="4800600"/>
-          </a:xfrm>
-          <a:prstGeom prst="rect">
-            <a:avLst/>
-          </a:prstGeom>
-        </p:spPr>
-        <p:txBody>
-          <a:bodyPr wrap="square"/>
-          <a:lstStyle/>
-          <a:p>
-            <a:r>
-              <a:rPr lang="zh-CN" dirty="0"/>
-              <a:t>第 40 节 · 类、实例与 self</a:t>
-            </a:r>
-          </a:p>
-          <a:p>
-            <a:r>
-              <a:rPr lang="zh-CN" dirty="0"/>
-              <a:t>单元 8 · 类 · W9</a:t>
-            </a:r>
-          </a:p>
-          <a:p>
-            <a:r>
-              <a:rPr lang="zh-CN" dirty="0"/>
-              <a:t/>
-            </a:r>
-          </a:p>
-          <a:p>
-            <a:r>
-              <a:rPr lang="zh-CN" dirty="0"/>
-              <a:t>学习目标：理解类是从「一堆变量」到「一类事物」，说清 self 指向谁</a:t>
-            </a:r>
-          </a:p>
-          <a:p>
-            <a:r>
-              <a:rPr lang="zh-CN" dirty="0"/>
-              <a:t/>
-            </a:r>
-          </a:p>
-          <a:p>
-            <a:r>
-              <a:rPr lang="zh-CN" dirty="0"/>
-              <a:t>课堂实操（40 分钟，不看答案）：</a:t>
-            </a:r>
-          </a:p>
-          <a:p>
-            <a:r>
-              <a:rPr lang="zh-CN" dirty="0"/>
-              <a:t>· 现场判断 self 是什么：实例本身，不是类</a:t>
-            </a:r>
-          </a:p>
-          <a:p>
-            <a:r>
-              <a:rPr lang="zh-CN" dirty="0"/>
-              <a:t>· 故意删掉 self 看报错</a:t>
-            </a:r>
-          </a:p>
-          <a:p>
-            <a:r>
-              <a:rPr lang="zh-CN" dirty="0"/>
-              <a:t/>
-            </a:r>
-          </a:p>
-          <a:p>
-            <a:r>
-              <a:rPr lang="zh-CN" dirty="0"/>
-              <a:t>课后作业：</a:t>
-            </a:r>
-          </a:p>
-          <a:p>
-            <a:r>
-              <a:rPr lang="zh-CN" dirty="0"/>
-              <a:t>· 完成动手练习 8-1</a:t>
-            </a:r>
-          </a:p>
-          <a:p>
-            <a:r>
-              <a:rPr lang="zh-CN" dirty="0"/>
-              <a:t/>
-            </a:r>
-          </a:p>
-          <a:p>
-            <a:r>
-              <a:rPr lang="zh-CN" dirty="0"/>
-              <a:t>节奏：讲 20 分钟 → 学员自己敲 40 分钟（不看答案）→ 对讲评自查 20 分钟 → 写作业 10 分钟。</a:t>
-            </a:r>
-          </a:p>
-        </p:txBody>
-      </p:sp>
-    </p:spTree>
-  </p:cSld>
-  <p:clrMapOvr>
-    <a:masterClrMapping/>
-  </p:clrMapOvr>
-</p:notes>
-</file>
-
-<file path=ppt/notesSlides/notesSlide3.xml><?xml version="1.0" encoding="utf-8"?>
-<p:notes xmlns:a="http://schemas.openxmlformats.org/drawingml/2006/main" xmlns:p="http://schemas.openxmlformats.org/presentationml/2006/main" xmlns:r="http://schemas.openxmlformats.org/officeDocument/2006/relationships">
-  <p:cSld>
-    <p:spTree>
-      <p:nvGrpSpPr>
-        <p:cNvPr id="1" name=""/>
-        <p:cNvGrpSpPr/>
-        <p:nvPr/>
-      </p:nvGrpSpPr>
-      <p:grpSpPr>
-        <a:xfrm>
-          <a:off x="0" y="0"/>
-          <a:ext cx="0" cy="0"/>
-          <a:chOff x="0" y="0"/>
-          <a:chExt cx="0" cy="0"/>
-        </a:xfrm>
-      </p:grpSpPr>
-      <p:sp>
-        <p:nvSpPr>
-          <p:cNvPr id="2" name="讲课提示"/>
-          <p:cNvSpPr txBox="1"/>
-          <p:nvPr/>
-        </p:nvSpPr>
-        <p:spPr>
-          <a:xfrm>
-            <a:off x="457200" y="457200"/>
-            <a:ext cx="6858000" cy="4800600"/>
-          </a:xfrm>
-          <a:prstGeom prst="rect">
-            <a:avLst/>
-          </a:prstGeom>
-        </p:spPr>
-        <p:txBody>
-          <a:bodyPr wrap="square"/>
-          <a:lstStyle/>
-          <a:p>
-            <a:r>
-              <a:rPr lang="zh-CN" dirty="0"/>
-              <a:t>第 40 节 · 核心知识点：类、实例与 self</a:t>
-            </a:r>
-          </a:p>
-          <a:p>
-            <a:r>
-              <a:rPr lang="zh-CN" dirty="0"/>
-              <a:t/>
-            </a:r>
-          </a:p>
-          <a:p>
-            <a:r>
-              <a:rPr lang="zh-CN" dirty="0"/>
-              <a:t>讲这一页时：先让学生说出上节课的结论，再逐块讲要点。</a:t>
-            </a:r>
-          </a:p>
-          <a:p>
-            <a:r>
-              <a:rPr lang="zh-CN" dirty="0"/>
-              <a:t>每讲完一块，问一句「这一步如果写错了，报错会长什么样？」——把错误提前讲。</a:t>
-            </a:r>
-          </a:p>
-          <a:p>
-            <a:r>
-              <a:rPr lang="zh-CN" dirty="0"/>
-              <a:t/>
-            </a:r>
-          </a:p>
-          <a:p>
-            <a:r>
-              <a:rPr lang="zh-CN" dirty="0"/>
-              <a:t>本节目标：理解类是从「一堆变量」到「一类事物」，说清 self 指向谁</a:t>
-            </a:r>
-          </a:p>
-          <a:p>
-            <a:r>
-              <a:rPr lang="zh-CN" dirty="0"/>
-              <a:t/>
-            </a:r>
-          </a:p>
-          <a:p>
-            <a:r>
-              <a:rPr lang="zh-CN" dirty="0"/>
-              <a:t>看不到懂的地方，回讲义对应小节读一遍，再回来对着这页复述一次——能讲出来才算真懂。</a:t>
-            </a:r>
-          </a:p>
-        </p:txBody>
-      </p:sp>
-    </p:spTree>
-  </p:cSld>
-  <p:clrMapOvr>
-    <a:masterClrMapping/>
-  </p:clrMapOvr>
-</p:notes>
-</file>
-
-<file path=ppt/notesSlides/notesSlide4.xml><?xml version="1.0" encoding="utf-8"?>
-<p:notes xmlns:a="http://schemas.openxmlformats.org/drawingml/2006/main" xmlns:p="http://schemas.openxmlformats.org/presentationml/2006/main" xmlns:r="http://schemas.openxmlformats.org/officeDocument/2006/relationships">
-  <p:cSld>
-    <p:spTree>
-      <p:nvGrpSpPr>
-        <p:cNvPr id="1" name=""/>
-        <p:cNvGrpSpPr/>
-        <p:nvPr/>
-      </p:nvGrpSpPr>
-      <p:grpSpPr>
-        <a:xfrm>
-          <a:off x="0" y="0"/>
-          <a:ext cx="0" cy="0"/>
-          <a:chOff x="0" y="0"/>
-          <a:chExt cx="0" cy="0"/>
-        </a:xfrm>
-      </p:grpSpPr>
-      <p:sp>
-        <p:nvSpPr>
-          <p:cNvPr id="2" name="讲课提示"/>
-          <p:cNvSpPr txBox="1"/>
-          <p:nvPr/>
-        </p:nvSpPr>
-        <p:spPr>
-          <a:xfrm>
-            <a:off x="457200" y="457200"/>
-            <a:ext cx="6858000" cy="4800600"/>
-          </a:xfrm>
-          <a:prstGeom prst="rect">
-            <a:avLst/>
-          </a:prstGeom>
-        </p:spPr>
-        <p:txBody>
-          <a:bodyPr wrap="square"/>
-          <a:lstStyle/>
-          <a:p>
-            <a:r>
-              <a:rPr lang="zh-CN" dirty="0"/>
-              <a:t>第 41 节 · __init__、属性方法与 __str__</a:t>
-            </a:r>
-          </a:p>
-          <a:p>
-            <a:r>
-              <a:rPr lang="zh-CN" dirty="0"/>
-              <a:t>单元 8 · 类 · W9</a:t>
-            </a:r>
-          </a:p>
-          <a:p>
-            <a:r>
-              <a:rPr lang="zh-CN" dirty="0"/>
-              <a:t/>
-            </a:r>
-          </a:p>
-          <a:p>
-            <a:r>
-              <a:rPr lang="zh-CN" dirty="0"/>
-              <a:t>学习目标：掌握对象的出生证明，能用 __str__ 让对象打印得可读</a:t>
-            </a:r>
-          </a:p>
-          <a:p>
-            <a:r>
-              <a:rPr lang="zh-CN" dirty="0"/>
-              <a:t/>
-            </a:r>
-          </a:p>
-          <a:p>
-            <a:r>
-              <a:rPr lang="zh-CN" dirty="0"/>
-              <a:t>课堂实操（40 分钟，不看答案）：</a:t>
-            </a:r>
-          </a:p>
-          <a:p>
-            <a:r>
-              <a:rPr lang="zh-CN" dirty="0"/>
-              <a:t>· 给类加 __str__ 前后各打印一次比较效果</a:t>
-            </a:r>
-          </a:p>
-          <a:p>
-            <a:r>
-              <a:rPr lang="zh-CN" dirty="0"/>
-              <a:t>· 现场区分属性和方法</a:t>
-            </a:r>
-          </a:p>
-          <a:p>
-            <a:r>
-              <a:rPr lang="zh-CN" dirty="0"/>
-              <a:t/>
-            </a:r>
-          </a:p>
-          <a:p>
-            <a:r>
-              <a:rPr lang="zh-CN" dirty="0"/>
-              <a:t>课后作业：</a:t>
-            </a:r>
-          </a:p>
-          <a:p>
-            <a:r>
-              <a:rPr lang="zh-CN" dirty="0"/>
-              <a:t>· 完成动手练习 8-2 ~ 8-3</a:t>
-            </a:r>
-          </a:p>
-          <a:p>
-            <a:r>
-              <a:rPr lang="zh-CN" dirty="0"/>
-              <a:t/>
-            </a:r>
-          </a:p>
-          <a:p>
-            <a:r>
-              <a:rPr lang="zh-CN" dirty="0"/>
-              <a:t>节奏：讲 20 分钟 → 学员自己敲 40 分钟（不看答案）→ 对讲评自查 20 分钟 → 写作业 10 分钟。</a:t>
-            </a:r>
-          </a:p>
-        </p:txBody>
-      </p:sp>
-    </p:spTree>
-  </p:cSld>
-  <p:clrMapOvr>
-    <a:masterClrMapping/>
-  </p:clrMapOvr>
-</p:notes>
-</file>
-
-<file path=ppt/notesSlides/notesSlide5.xml><?xml version="1.0" encoding="utf-8"?>
-<p:notes xmlns:a="http://schemas.openxmlformats.org/drawingml/2006/main" xmlns:p="http://schemas.openxmlformats.org/presentationml/2006/main" xmlns:r="http://schemas.openxmlformats.org/officeDocument/2006/relationships">
-  <p:cSld>
-    <p:spTree>
-      <p:nvGrpSpPr>
-        <p:cNvPr id="1" name=""/>
-        <p:cNvGrpSpPr/>
-        <p:nvPr/>
-      </p:nvGrpSpPr>
-      <p:grpSpPr>
-        <a:xfrm>
-          <a:off x="0" y="0"/>
-          <a:ext cx="0" cy="0"/>
-          <a:chOff x="0" y="0"/>
-          <a:chExt cx="0" cy="0"/>
-        </a:xfrm>
-      </p:grpSpPr>
-      <p:sp>
-        <p:nvSpPr>
-          <p:cNvPr id="2" name="讲课提示"/>
-          <p:cNvSpPr txBox="1"/>
-          <p:nvPr/>
-        </p:nvSpPr>
-        <p:spPr>
-          <a:xfrm>
-            <a:off x="457200" y="457200"/>
-            <a:ext cx="6858000" cy="4800600"/>
-          </a:xfrm>
-          <a:prstGeom prst="rect">
-            <a:avLst/>
-          </a:prstGeom>
-        </p:spPr>
-        <p:txBody>
-          <a:bodyPr wrap="square"/>
-          <a:lstStyle/>
-          <a:p>
-            <a:r>
-              <a:rPr lang="zh-CN" dirty="0"/>
-              <a:t>第 41 节 · 核心知识点：__init__、属性方法与 __str__</a:t>
-            </a:r>
-          </a:p>
-          <a:p>
-            <a:r>
-              <a:rPr lang="zh-CN" dirty="0"/>
-              <a:t/>
-            </a:r>
-          </a:p>
-          <a:p>
-            <a:r>
-              <a:rPr lang="zh-CN" dirty="0"/>
-              <a:t>讲这一页时：先让学生说出上节课的结论，再逐块讲要点。</a:t>
-            </a:r>
-          </a:p>
-          <a:p>
-            <a:r>
-              <a:rPr lang="zh-CN" dirty="0"/>
-              <a:t>每讲完一块，问一句「这一步如果写错了，报错会长什么样？」——把错误提前讲。</a:t>
-            </a:r>
-          </a:p>
-          <a:p>
-            <a:r>
-              <a:rPr lang="zh-CN" dirty="0"/>
-              <a:t/>
-            </a:r>
-          </a:p>
-          <a:p>
-            <a:r>
-              <a:rPr lang="zh-CN" dirty="0"/>
-              <a:t>本节目标：掌握对象的出生证明，能用 __str__ 让对象打印得可读</a:t>
-            </a:r>
-          </a:p>
-          <a:p>
-            <a:r>
-              <a:rPr lang="zh-CN" dirty="0"/>
-              <a:t/>
-            </a:r>
-          </a:p>
-          <a:p>
-            <a:r>
-              <a:rPr lang="zh-CN" dirty="0"/>
-              <a:t>看不到懂的地方，回讲义对应小节读一遍，再回来对着这页复述一次——能讲出来才算真懂。</a:t>
-            </a:r>
-          </a:p>
-        </p:txBody>
-      </p:sp>
-    </p:spTree>
-  </p:cSld>
-  <p:clrMapOvr>
-    <a:masterClrMapping/>
-  </p:clrMapOvr>
-</p:notes>
-</file>
-
-<file path=ppt/notesSlides/notesSlide6.xml><?xml version="1.0" encoding="utf-8"?>
-<p:notes xmlns:a="http://schemas.openxmlformats.org/drawingml/2006/main" xmlns:p="http://schemas.openxmlformats.org/presentationml/2006/main" xmlns:r="http://schemas.openxmlformats.org/officeDocument/2006/relationships">
-  <p:cSld>
-    <p:spTree>
-      <p:nvGrpSpPr>
-        <p:cNvPr id="1" name=""/>
-        <p:cNvGrpSpPr/>
-        <p:nvPr/>
-      </p:nvGrpSpPr>
-      <p:grpSpPr>
-        <a:xfrm>
-          <a:off x="0" y="0"/>
-          <a:ext cx="0" cy="0"/>
-          <a:chOff x="0" y="0"/>
-          <a:chExt cx="0" cy="0"/>
-        </a:xfrm>
-      </p:grpSpPr>
-      <p:sp>
-        <p:nvSpPr>
-          <p:cNvPr id="2" name="讲课提示"/>
-          <p:cNvSpPr txBox="1"/>
-          <p:nvPr/>
-        </p:nvSpPr>
-        <p:spPr>
-          <a:xfrm>
-            <a:off x="457200" y="457200"/>
-            <a:ext cx="6858000" cy="4800600"/>
-          </a:xfrm>
-          <a:prstGeom prst="rect">
-            <a:avLst/>
-          </a:prstGeom>
-        </p:spPr>
-        <p:txBody>
-          <a:bodyPr wrap="square"/>
-          <a:lstStyle/>
-          <a:p>
-            <a:r>
-              <a:rPr lang="zh-CN" dirty="0"/>
-              <a:t>第 42 节 · 继承与方法重写</a:t>
-            </a:r>
-          </a:p>
-          <a:p>
-            <a:r>
-              <a:rPr lang="zh-CN" dirty="0"/>
-              <a:t>单元 8 · 类 · W10</a:t>
-            </a:r>
-          </a:p>
-          <a:p>
-            <a:r>
-              <a:rPr lang="zh-CN" dirty="0"/>
-              <a:t/>
-            </a:r>
-          </a:p>
-          <a:p>
-            <a:r>
-              <a:rPr lang="zh-CN" dirty="0"/>
-              <a:t>学习目标：会用 super().__init__()，理解重写与多态</a:t>
-            </a:r>
-          </a:p>
-          <a:p>
-            <a:r>
-              <a:rPr lang="zh-CN" dirty="0"/>
-              <a:t/>
-            </a:r>
-          </a:p>
-          <a:p>
-            <a:r>
-              <a:rPr lang="zh-CN" dirty="0"/>
-              <a:t>课堂实操（40 分钟，不看答案）：</a:t>
-            </a:r>
-          </a:p>
-          <a:p>
-            <a:r>
-              <a:rPr lang="zh-CN" dirty="0"/>
-              <a:t>· 现场演示子类忘记 super() 会怎样</a:t>
-            </a:r>
-          </a:p>
-          <a:p>
-            <a:r>
-              <a:rPr lang="zh-CN" dirty="0"/>
-              <a:t>· 把 Dog 和 Car 改成继承关系</a:t>
-            </a:r>
-          </a:p>
-          <a:p>
-            <a:r>
-              <a:rPr lang="zh-CN" dirty="0"/>
-              <a:t/>
-            </a:r>
-          </a:p>
-          <a:p>
-            <a:r>
-              <a:rPr lang="zh-CN" dirty="0"/>
-              <a:t>课后作业：</a:t>
-            </a:r>
-          </a:p>
-          <a:p>
-            <a:r>
-              <a:rPr lang="zh-CN" dirty="0"/>
-              <a:t>· 完成动手练习 8-4 ~ 8-6</a:t>
-            </a:r>
-          </a:p>
-          <a:p>
-            <a:r>
-              <a:rPr lang="zh-CN" dirty="0"/>
-              <a:t/>
-            </a:r>
-          </a:p>
-          <a:p>
-            <a:r>
-              <a:rPr lang="zh-CN" dirty="0"/>
-              <a:t>节奏：讲 20 分钟 → 学员自己敲 40 分钟（不看答案）→ 对讲评自查 20 分钟 → 写作业 10 分钟。</a:t>
-            </a:r>
-          </a:p>
-        </p:txBody>
-      </p:sp>
-    </p:spTree>
-  </p:cSld>
-  <p:clrMapOvr>
-    <a:masterClrMapping/>
-  </p:clrMapOvr>
-</p:notes>
-</file>
-
-<file path=ppt/notesSlides/notesSlide7.xml><?xml version="1.0" encoding="utf-8"?>
-<p:notes xmlns:a="http://schemas.openxmlformats.org/drawingml/2006/main" xmlns:p="http://schemas.openxmlformats.org/presentationml/2006/main" xmlns:r="http://schemas.openxmlformats.org/officeDocument/2006/relationships">
-  <p:cSld>
-    <p:spTree>
-      <p:nvGrpSpPr>
-        <p:cNvPr id="1" name=""/>
-        <p:cNvGrpSpPr/>
-        <p:nvPr/>
-      </p:nvGrpSpPr>
-      <p:grpSpPr>
-        <a:xfrm>
-          <a:off x="0" y="0"/>
-          <a:ext cx="0" cy="0"/>
-          <a:chOff x="0" y="0"/>
-          <a:chExt cx="0" cy="0"/>
-        </a:xfrm>
-      </p:grpSpPr>
-      <p:sp>
-        <p:nvSpPr>
-          <p:cNvPr id="2" name="讲课提示"/>
-          <p:cNvSpPr txBox="1"/>
-          <p:nvPr/>
-        </p:nvSpPr>
-        <p:spPr>
-          <a:xfrm>
-            <a:off x="457200" y="457200"/>
-            <a:ext cx="6858000" cy="4800600"/>
-          </a:xfrm>
-          <a:prstGeom prst="rect">
-            <a:avLst/>
-          </a:prstGeom>
-        </p:spPr>
-        <p:txBody>
-          <a:bodyPr wrap="square"/>
-          <a:lstStyle/>
-          <a:p>
-            <a:r>
-              <a:rPr lang="zh-CN" dirty="0"/>
-              <a:t>第 42 节 · 核心知识点：继承与方法重写</a:t>
-            </a:r>
-          </a:p>
-          <a:p>
-            <a:r>
-              <a:rPr lang="zh-CN" dirty="0"/>
-              <a:t/>
-            </a:r>
-          </a:p>
-          <a:p>
-            <a:r>
-              <a:rPr lang="zh-CN" dirty="0"/>
-              <a:t>讲这一页时：先让学生说出上节课的结论，再逐块讲要点。</a:t>
-            </a:r>
-          </a:p>
-          <a:p>
-            <a:r>
-              <a:rPr lang="zh-CN" dirty="0"/>
-              <a:t>每讲完一块，问一句「这一步如果写错了，报错会长什么样？」——把错误提前讲。</a:t>
-            </a:r>
-          </a:p>
-          <a:p>
-            <a:r>
-              <a:rPr lang="zh-CN" dirty="0"/>
-              <a:t/>
-            </a:r>
-          </a:p>
-          <a:p>
-            <a:r>
-              <a:rPr lang="zh-CN" dirty="0"/>
-              <a:t>本节目标：会用 super().__init__()，理解重写与多态</a:t>
-            </a:r>
-          </a:p>
-          <a:p>
-            <a:r>
-              <a:rPr lang="zh-CN" dirty="0"/>
-              <a:t/>
-            </a:r>
-          </a:p>
-          <a:p>
-            <a:r>
-              <a:rPr lang="zh-CN" dirty="0"/>
-              <a:t>看不到懂的地方，回讲义对应小节读一遍，再回来对着这页复述一次——能讲出来才算真懂。</a:t>
-            </a:r>
-          </a:p>
-        </p:txBody>
-      </p:sp>
-    </p:spTree>
-  </p:cSld>
-  <p:clrMapOvr>
-    <a:masterClrMapping/>
-  </p:clrMapOvr>
-</p:notes>
-</file>
-
-<file path=ppt/notesSlides/notesSlide8.xml><?xml version="1.0" encoding="utf-8"?>
-<p:notes xmlns:a="http://schemas.openxmlformats.org/drawingml/2006/main" xmlns:p="http://schemas.openxmlformats.org/presentationml/2006/main" xmlns:r="http://schemas.openxmlformats.org/officeDocument/2006/relationships">
-  <p:cSld>
-    <p:spTree>
-      <p:nvGrpSpPr>
-        <p:cNvPr id="1" name=""/>
-        <p:cNvGrpSpPr/>
-        <p:nvPr/>
-      </p:nvGrpSpPr>
-      <p:grpSpPr>
-        <a:xfrm>
-          <a:off x="0" y="0"/>
-          <a:ext cx="0" cy="0"/>
-          <a:chOff x="0" y="0"/>
-          <a:chExt cx="0" cy="0"/>
-        </a:xfrm>
-      </p:grpSpPr>
-      <p:sp>
-        <p:nvSpPr>
-          <p:cNvPr id="2" name="讲课提示"/>
-          <p:cNvSpPr txBox="1"/>
-          <p:nvPr/>
-        </p:nvSpPr>
-        <p:spPr>
-          <a:xfrm>
-            <a:off x="457200" y="457200"/>
-            <a:ext cx="6858000" cy="4800600"/>
-          </a:xfrm>
-          <a:prstGeom prst="rect">
-            <a:avLst/>
-          </a:prstGeom>
-        </p:spPr>
-        <p:txBody>
-          <a:bodyPr wrap="square"/>
-          <a:lstStyle/>
-          <a:p>
-            <a:r>
-              <a:rPr lang="zh-CN" dirty="0"/>
-              <a:t>第 43 节 · 类的组合与示例串讲</a:t>
-            </a:r>
-          </a:p>
-          <a:p>
-            <a:r>
-              <a:rPr lang="zh-CN" dirty="0"/>
-              <a:t>单元 8 · 类 · W10</a:t>
-            </a:r>
-          </a:p>
-          <a:p>
-            <a:r>
-              <a:rPr lang="zh-CN" dirty="0"/>
-              <a:t/>
-            </a:r>
-          </a:p>
-          <a:p>
-            <a:r>
-              <a:rPr lang="zh-CN" dirty="0"/>
-              <a:t>学习目标：能用组合代替继承，理解何时该用组合、何时该用继承</a:t>
-            </a:r>
-          </a:p>
-          <a:p>
-            <a:r>
-              <a:rPr lang="zh-CN" dirty="0"/>
-              <a:t/>
-            </a:r>
-          </a:p>
-          <a:p>
-            <a:r>
-              <a:rPr lang="zh-CN" dirty="0"/>
-              <a:t>课堂实操（40 分钟，不看答案）：</a:t>
-            </a:r>
-          </a:p>
-          <a:p>
-            <a:r>
-              <a:rPr lang="zh-CN" dirty="0"/>
-              <a:t>· 把三个类改成组合结构</a:t>
-            </a:r>
-          </a:p>
-          <a:p>
-            <a:r>
-              <a:rPr lang="zh-CN" dirty="0"/>
-              <a:t>· 对照示例讲清类设计的取舍</a:t>
-            </a:r>
-          </a:p>
-          <a:p>
-            <a:r>
-              <a:rPr lang="zh-CN" dirty="0"/>
-              <a:t/>
-            </a:r>
-          </a:p>
-          <a:p>
-            <a:r>
-              <a:rPr lang="zh-CN" dirty="0"/>
-              <a:t>课后作业：</a:t>
-            </a:r>
-          </a:p>
-          <a:p>
-            <a:r>
-              <a:rPr lang="zh-CN" dirty="0"/>
-              <a:t>· 完成动手练习进阶档 8-7 ~ 8-8</a:t>
-            </a:r>
-          </a:p>
-          <a:p>
-            <a:r>
-              <a:rPr lang="zh-CN" dirty="0"/>
-              <a:t/>
-            </a:r>
-          </a:p>
-          <a:p>
-            <a:r>
-              <a:rPr lang="zh-CN" dirty="0"/>
-              <a:t>节奏：讲 20 分钟 → 学员自己敲 40 分钟（不看答案）→ 对讲评自查 20 分钟 → 写作业 10 分钟。</a:t>
-            </a:r>
-          </a:p>
-        </p:txBody>
-      </p:sp>
-    </p:spTree>
-  </p:cSld>
-  <p:clrMapOvr>
-    <a:masterClrMapping/>
-  </p:clrMapOvr>
-</p:notes>
-</file>
-
-<file path=ppt/notesSlides/notesSlide9.xml><?xml version="1.0" encoding="utf-8"?>
-<p:notes xmlns:a="http://schemas.openxmlformats.org/drawingml/2006/main" xmlns:p="http://schemas.openxmlformats.org/presentationml/2006/main" xmlns:r="http://schemas.openxmlformats.org/officeDocument/2006/relationships">
-  <p:cSld>
-    <p:spTree>
-      <p:nvGrpSpPr>
-        <p:cNvPr id="1" name=""/>
-        <p:cNvGrpSpPr/>
-        <p:nvPr/>
-      </p:nvGrpSpPr>
-      <p:grpSpPr>
-        <a:xfrm>
-          <a:off x="0" y="0"/>
-          <a:ext cx="0" cy="0"/>
-          <a:chOff x="0" y="0"/>
-          <a:chExt cx="0" cy="0"/>
-        </a:xfrm>
-      </p:grpSpPr>
-      <p:sp>
-        <p:nvSpPr>
-          <p:cNvPr id="2" name="讲课提示"/>
-          <p:cNvSpPr txBox="1"/>
-          <p:nvPr/>
-        </p:nvSpPr>
-        <p:spPr>
-          <a:xfrm>
-            <a:off x="457200" y="457200"/>
-            <a:ext cx="6858000" cy="4800600"/>
-          </a:xfrm>
-          <a:prstGeom prst="rect">
-            <a:avLst/>
-          </a:prstGeom>
-        </p:spPr>
-        <p:txBody>
-          <a:bodyPr wrap="square"/>
-          <a:lstStyle/>
-          <a:p>
-            <a:r>
-              <a:rPr lang="zh-CN" dirty="0"/>
-              <a:t>第 43 节 · 核心知识点：类的组合与示例串讲</a:t>
-            </a:r>
-          </a:p>
-          <a:p>
-            <a:r>
-              <a:rPr lang="zh-CN" dirty="0"/>
-              <a:t/>
-            </a:r>
-          </a:p>
-          <a:p>
-            <a:r>
-              <a:rPr lang="zh-CN" dirty="0"/>
-              <a:t>讲这一页时：先让学生说出上节课的结论，再逐块讲要点。</a:t>
-            </a:r>
-          </a:p>
-          <a:p>
-            <a:r>
-              <a:rPr lang="zh-CN" dirty="0"/>
-              <a:t>每讲完一块，问一句「这一步如果写错了，报错会长什么样？」——把错误提前讲。</a:t>
-            </a:r>
-          </a:p>
-          <a:p>
-            <a:r>
-              <a:rPr lang="zh-CN" dirty="0"/>
-              <a:t/>
-            </a:r>
-          </a:p>
-          <a:p>
-            <a:r>
-              <a:rPr lang="zh-CN" dirty="0"/>
-              <a:t>本节目标：能用组合代替继承，理解何时该用组合、何时该用继承</a:t>
-            </a:r>
-          </a:p>
-          <a:p>
-            <a:r>
-              <a:rPr lang="zh-CN" dirty="0"/>
-              <a:t/>
-            </a:r>
-          </a:p>
-          <a:p>
-            <a:r>
-              <a:rPr lang="zh-CN" dirty="0"/>
-              <a:t>看不到懂的地方，回讲义对应小节读一遍，再回来对着这页复述一次——能讲出来才算真懂。</a:t>
-            </a:r>
-          </a:p>
-        </p:txBody>
-      </p:sp>
-    </p:spTree>
-  </p:cSld>
-  <p:clrMapOvr>
-    <a:masterClrMapping/>
-  </p:clrMapOvr>
-</p:notes>
 </file>
 
 <file path=ppt/slideLayouts/slideLayout1.xml><?xml version="1.0" encoding="utf-8"?>

--- a/python-course-ppt/逐节课件/Python讲授课件-单元08.pptx
+++ b/python-course-ppt/逐节课件/Python讲授课件-单元08.pptx
@@ -1514,7 +1514,7 @@
   <p:cSld>
     <p:spTree>
       <p:nvGrpSpPr>
-        <p:cNvPr id="28" name="" descr="&lt;Slide style={{ width: '1280px', height: '720px', backgroundColor: '#FAFCFE', padding: 0, position: 'relative', overflow: 'hidden' }}&gt;&#13;&#10;    &lt;Box style={{ position: 'absolute', left: 64, top: 36, width: '1152px', flexDirection: 'row', alignItems: 'center', gap: 12 }}&gt;&#13;&#10;        &lt;Box style={{ background: '#0E9B78', borderRadius: 5, padding: '3px 11px' }}&gt;&#13;&#10;            &lt;Text style={{ fontSize: 14, fontWeight: 'bold', color: '#FFFFFF' }}&gt;第 45 节&lt;/Text&gt;&#13;&#10;        &lt;/Box&gt;&#13;&#10;        &lt;Text style={{ fontSize: 30, fontWeight: 'bold', color: '#16232E' }}&gt;核心知识点&lt;/Text&gt;&#13;&#10;        &lt;Text style={{ fontSize: 15, color: '#5A6B7A', marginTop: 10 }}&gt;· ★ 六个常见错误逐条自查&lt;/Text&gt;&#13;&#10;    &lt;/Box&gt;&#13;&#10;    &lt;Box style={{ position: 'absolute', left: 0, top: 0, width: '1280px', height: '720px' }}&gt;&#13;&#10;        &lt;svg width='1280' height='720' viewBox='0 0 1280 720'&gt;&#13;&#10;            &lt;rect x='64' y='96' width='368' height='330' rx='12' fill='#FFFFFF' stroke='#D8E3EE' /&gt;&lt;rect x='64' y='96' width='368' height='4' rx='2' fill='#1F5FA8' /&gt;&lt;text x='82' y='130' fontSize='15.5' fontWeight='bold' fill='#1F5FA8' textAnchor='start' fontFamily='Microsoft YaHei'&gt;错误 1：★ 方法忘记写 self&lt;/text&gt;&lt;text x='82' y='169.0' fontSize='13' fill='#3A4A58' textAnchor='start' fontFamily='Microsoft YaHei'&gt;· NameError: name 'count' is not defined（左边忘&lt;/text&gt;&lt;text x='82' y='188.5' fontSize='13' fill='#3A4A58' textAnchor='start' fontFamily='Microsoft YaHei'&gt;了写）&lt;/text&gt;&lt;text x='82' y='217.0' fontSize='13' fill='#3A4A58' textAnchor='start' fontFamily='Microsoft YaHei'&gt;· 属性值永远不变 / 方法结束后&quot;数据丢了&quot;&lt;/text&gt;&lt;text x='82' y='245.5' fontSize='13' fill='#3A4A58' textAnchor='start' fontFamily='Microsoft YaHei'&gt;· 属性变成 None 或 0&lt;/text&gt;&lt;rect x='468' y='96' width='368' height='330' rx='12' fill='#FFFFFF' stroke='#D8E3EE' /&gt;&lt;rect x='468' y='96' width='368' height='4' rx='2' fill='#1F5FA8' /&gt;&lt;text x='486' y='130' fontSize='15.5' fontWeight='bold' fill='#1F5FA8' textAnchor='start' fontFamily='Microsoft YaHei'&gt;错误 2：方法定义时忘了第一个参数 self&lt;/text&gt;&lt;text x='486' y='169.0' fontSize='13' fill='#3A4A58' textAnchor='start' fontFamily='Microsoft YaHei'&gt;· class Rectangle:&lt;/text&gt;&lt;rect x='872' y='96' width='368' height='330' rx='12' fill='#FFFFFF' stroke='#D8E3EE' /&gt;&lt;rect x='872' y='96' width='368' height='4' rx='2' fill='#1F5FA8' /&gt;&lt;text x='890' y='130' fontSize='15.5' fontWeight='bold' fill='#1F5FA8' textAnchor='start' fontFamily='Microsoft YaHei'&gt;错误 3：忘记冒号或缩进（和函数一样，但更&lt;/text&gt;&lt;text x='890' y='153' fontSize='15.5' fontWeight='bold' fill='#1F5FA8' textAnchor='start' fontFamily='Microsoft YaHei'&gt;隐蔽）&lt;/text&gt;&lt;text x='890' y='192.0' fontSize='13' fill='#3A4A58' textAnchor='start' fontFamily='Microsoft YaHei'&gt;· class Dog:&lt;/text&gt;&lt;rect x='64' y='574' width='1152' height='66' rx='12' fill='#EEF5FB' /&gt;&lt;text x='84' y='616' fontSize='14' fill='#243444' textAnchor='start' fontFamily='Microsoft YaHei'&gt;看不懂的地方先回讲义对应小节读一遍，再回来对着这页复述一次——能讲出来才算真懂。&lt;/text&gt;&#13;&#10;            &lt;text x='64' y='684' fontSize='13' fill='#8A9AAA' fontFamily='Microsoft YaHei'&gt;Python 讲授课件 · 逐节版&lt;/text&gt;&#13;&#10;            &lt;text x='1216' y='684' fontSize='13' fill='#8A9AAA' textAnchor='end' fontFamily='Microsoft YaHei'&gt;单元 8 · 第 45 节&lt;/text&gt;&#13;&#10;        &lt;/svg&gt;&#13;&#10;    &lt;/Box&gt;&#13;&#10;&lt;/Slide&gt;&#13;&#10;"/>
+        <p:cNvPr id="28" name="" descr="&lt;Slide style={{ width: '1280px', height: '720px', backgroundColor: '#FAFCFE', padding: 0, position: 'relative', overflow: 'hidden' }}&gt;&#13;&#10;    &lt;Box style={{ position: 'absolute', left: 64, top: 36, width: '1152px', flexDirection: 'row', alignItems: 'center', gap: 12 }}&gt;&#13;&#10;        &lt;Box style={{ background: '#0E9B78', borderRadius: 5, padding: '3px 11px' }}&gt;&#13;&#10;            &lt;Text style={{ fontSize: 14, fontWeight: 'bold', color: '#FFFFFF' }}&gt;第 45 节&lt;/Text&gt;&#13;&#10;        &lt;/Box&gt;&#13;&#10;        &lt;Text style={{ fontSize: 30, fontWeight: 'bold', color: '#16232E' }}&gt;核心知识点&lt;/Text&gt;&#13;&#10;        &lt;Text style={{ fontSize: 15, color: '#5A6B7A', marginTop: 10 }}&gt;· ★ 六个常见错误逐条自查&lt;/Text&gt;&#13;&#10;    &lt;/Box&gt;&#13;&#10;    &lt;Box style={{ position: 'absolute', left: 0, top: 0, width: '1280px', height: '720px' }}&gt;&#13;&#10;        &lt;svg width='1280' height='720' viewBox='0 0 1280 720'&gt;&#13;&#10;            &lt;rect x='64' y='96' width='368' height='330' rx='12' fill='#FFFFFF' stroke='#D8E3EE' /&gt;&lt;rect x='64' y='96' width='368' height='4' rx='2' fill='#1F5FA8' /&gt;&lt;text x='82' y='130' fontSize='15.5' fontWeight='bold' fill='#1F5FA8' textAnchor='start' fontFamily='Microsoft YaHei'&gt;错误 1：★ 方法忘记写 self&lt;/text&gt;&lt;text x='82' y='169.0' fontSize='13' fill='#3A4A58' textAnchor='start' fontFamily='Microsoft YaHei'&gt;· NameError: name 'count' is not&lt;/text&gt;&lt;text x='82' y='188.5' fontSize='13' fill='#3A4A58' textAnchor='start' fontFamily='Microsoft YaHei'&gt;defined（左边忘了写）&lt;/text&gt;&lt;text x='82' y='217.0' fontSize='13' fill='#3A4A58' textAnchor='start' fontFamily='Microsoft YaHei'&gt;· 属性值永远不变 / 方法结束后&quot;数据丢了&quot;&lt;/text&gt;&lt;text x='82' y='245.5' fontSize='13' fill='#3A4A58' textAnchor='start' fontFamily='Microsoft YaHei'&gt;· 属性变成 None 或 0&lt;/text&gt;&lt;rect x='468' y='96' width='368' height='330' rx='12' fill='#FFFFFF' stroke='#D8E3EE' /&gt;&lt;rect x='468' y='96' width='368' height='4' rx='2' fill='#1F5FA8' /&gt;&lt;text x='486' y='130' fontSize='15.5' fontWeight='bold' fill='#1F5FA8' textAnchor='start' fontFamily='Microsoft YaHei'&gt;错误 2：方法定义时忘了第一个参数 self&lt;/text&gt;&lt;text x='486' y='169.0' fontSize='13' fill='#3A4A58' textAnchor='start' fontFamily='Microsoft YaHei'&gt;· class Rectangle:&lt;/text&gt;&lt;rect x='872' y='96' width='368' height='330' rx='12' fill='#FFFFFF' stroke='#D8E3EE' /&gt;&lt;rect x='872' y='96' width='368' height='4' rx='2' fill='#1F5FA8' /&gt;&lt;text x='890' y='130' fontSize='15.5' fontWeight='bold' fill='#1F5FA8' textAnchor='start' fontFamily='Microsoft YaHei'&gt;错误 3：忘记冒号或缩进（和函数一样，&lt;/text&gt;&lt;text x='890' y='153' fontSize='15.5' fontWeight='bold' fill='#1F5FA8' textAnchor='start' fontFamily='Microsoft YaHei'&gt;但更隐蔽）&lt;/text&gt;&lt;text x='890' y='192.0' fontSize='13' fill='#3A4A58' textAnchor='start' fontFamily='Microsoft YaHei'&gt;· class Dog:&lt;/text&gt;&lt;rect x='64' y='574' width='1152' height='66' rx='12' fill='#EEF5FB' /&gt;&lt;text x='84' y='616' fontSize='14' fill='#243444' textAnchor='start' fontFamily='Microsoft YaHei'&gt;看不懂的地方先回讲义对应小节读一遍，再回来对着这页复述一次——能讲出来才算真懂。&lt;/text&gt;&#13;&#10;            &lt;text x='64' y='684' fontSize='13' fill='#8A9AAA' fontFamily='Microsoft YaHei'&gt;Python 讲授课件 · 逐节版&lt;/text&gt;&#13;&#10;            &lt;text x='1216' y='684' fontSize='13' fill='#8A9AAA' textAnchor='end' fontFamily='Microsoft YaHei'&gt;单元 8 · 第 45 节&lt;/text&gt;&#13;&#10;        &lt;/svg&gt;&#13;&#10;    &lt;/Box&gt;&#13;&#10;&lt;/Slide&gt;&#13;&#10;"/>
         <p:cNvGrpSpPr/>
         <p:nvPr/>
       </p:nvGrpSpPr>
@@ -3016,7 +3016,7 @@
   <p:cSld>
     <p:spTree>
       <p:nvGrpSpPr>
-        <p:cNvPr id="68" name="" descr="&lt;Slide style={{ width: '1280px', height: '720px', backgroundColor: '#FAFCFE', padding: 0, position: 'relative', overflow: 'hidden' }}&gt;&#13;&#10;    &lt;Box style={{ position: 'absolute', left: 64, top: 36, width: '1152px', flexDirection: 'row', alignItems: 'center', gap: 12 }}&gt;&#13;&#10;        &lt;Box style={{ background: '#0E9B78', borderRadius: 5, padding: '3px 11px' }}&gt;&#13;&#10;            &lt;Text style={{ fontSize: 14, fontWeight: 'bold', color: '#FFFFFF' }}&gt;第 40 节&lt;/Text&gt;&#13;&#10;        &lt;/Box&gt;&#13;&#10;        &lt;Text style={{ fontSize: 30, fontWeight: 'bold', color: '#16232E' }}&gt;核心知识点&lt;/Text&gt;&#13;&#10;        &lt;Text style={{ fontSize: 15, color: '#5A6B7A', marginTop: 10 }}&gt;· 类、实例与 self&lt;/Text&gt;&#13;&#10;    &lt;/Box&gt;&#13;&#10;    &lt;Box style={{ position: 'absolute', left: 0, top: 0, width: '1280px', height: '720px' }}&gt;&#13;&#10;        &lt;svg width='1280' height='720' viewBox='0 0 1280 720'&gt;&#13;&#10;            &lt;rect x='64' y='96' width='548' height='330' rx='12' fill='#FFFFFF' stroke='#D8E3EE' /&gt;&lt;rect x='64' y='96' width='548' height='4' rx='2' fill='#1F5FA8' /&gt;&lt;text x='82' y='130' fontSize='15.5' fontWeight='bold' fill='#1F5FA8' textAnchor='start' fontFamily='Microsoft YaHei'&gt;2.1 类：从&quot;一堆变量&quot;到&quot;一类事物&quot;&lt;/text&gt;&lt;text x='82' y='169.0' fontSize='13' fill='#3A4A58' textAnchor='start' fontFamily='Microsoft YaHei'&gt;· 类 = 建筑图纸（规定了所有房子有什么：几室几厅、什么材料）&lt;/text&gt;&lt;text x='82' y='197.5' fontSize='13' fill='#3A4A58' textAnchor='start' fontFamily='Microsoft YaHei'&gt;· 对象 = 按图纸盖出来的具体房子（小明家的房子、小红家的房子）&lt;/text&gt;&lt;text x='82' y='226.0' fontSize='13' fill='#3A4A58' textAnchor='start' fontFamily='Microsoft YaHei'&gt;· 属性 = 房子的固有特征（面积、楼层、朝向）&lt;/text&gt;&lt;rect x='668' y='96' width='548' height='330' rx='12' fill='#FFFFFF' stroke='#D8E3EE' /&gt;&lt;rect x='668' y='96' width='548' height='4' rx='2' fill='#1F5FA8' /&gt;&lt;text x='686' y='130' fontSize='15.5' fontWeight='bold' fill='#1F5FA8' textAnchor='start' fontFamily='Microsoft YaHei'&gt;2.2 self：整个 Python 面向对象的核心&lt;/text&gt;&lt;text x='686' y='169.0' fontSize='13' fill='#3A4A58' textAnchor='start' fontFamily='Microsoft YaHei'&gt;· self 到底是什么？ 它就是&quot;当前这个对象自己&quot;的引用。&lt;/text&gt;&lt;text x='686' y='197.5' fontSize='13' fill='#3A4A58' textAnchor='start' fontFamily='Microsoft YaHei'&gt;· self = 说话的那个人（&quot;我&quot;）&lt;/text&gt;&lt;text x='686' y='226.0' fontSize='13' fill='#3A4A58' textAnchor='start' fontFamily='Microsoft YaHei'&gt;· self.age = &quot;我的年龄&quot;&lt;/text&gt;&lt;rect x='64' y='574' width='1152' height='66' rx='12' fill='#EEF5FB' /&gt;&lt;text x='84' y='616' fontSize='14' fill='#243444' textAnchor='start' fontFamily='Microsoft YaHei'&gt;看不懂的地方先回讲义对应小节读一遍，再回来对着这页复述一次——能讲出来才算真懂。&lt;/text&gt;&#13;&#10;            &lt;text x='64' y='684' fontSize='13' fill='#8A9AAA' fontFamily='Microsoft YaHei'&gt;Python 讲授课件 · 逐节版&lt;/text&gt;&#13;&#10;            &lt;text x='1216' y='684' fontSize='13' fill='#8A9AAA' textAnchor='end' fontFamily='Microsoft YaHei'&gt;单元 8 · 第 40 节&lt;/text&gt;&#13;&#10;        &lt;/svg&gt;&#13;&#10;    &lt;/Box&gt;&#13;&#10;&lt;/Slide&gt;&#13;&#10;"/>
+        <p:cNvPr id="68" name="" descr="&lt;Slide style={{ width: '1280px', height: '720px', backgroundColor: '#FAFCFE', padding: 0, position: 'relative', overflow: 'hidden' }}&gt;&#13;&#10;    &lt;Box style={{ position: 'absolute', left: 64, top: 36, width: '1152px', flexDirection: 'row', alignItems: 'center', gap: 12 }}&gt;&#13;&#10;        &lt;Box style={{ background: '#0E9B78', borderRadius: 5, padding: '3px 11px' }}&gt;&#13;&#10;            &lt;Text style={{ fontSize: 14, fontWeight: 'bold', color: '#FFFFFF' }}&gt;第 40 节&lt;/Text&gt;&#13;&#10;        &lt;/Box&gt;&#13;&#10;        &lt;Text style={{ fontSize: 30, fontWeight: 'bold', color: '#16232E' }}&gt;核心知识点&lt;/Text&gt;&#13;&#10;        &lt;Text style={{ fontSize: 15, color: '#5A6B7A', marginTop: 10 }}&gt;· 类、实例与 self&lt;/Text&gt;&#13;&#10;    &lt;/Box&gt;&#13;&#10;    &lt;Box style={{ position: 'absolute', left: 0, top: 0, width: '1280px', height: '720px' }}&gt;&#13;&#10;        &lt;svg width='1280' height='720' viewBox='0 0 1280 720'&gt;&#13;&#10;            &lt;rect x='64' y='96' width='548' height='330' rx='12' fill='#FFFFFF' stroke='#D8E3EE' /&gt;&lt;rect x='64' y='96' width='548' height='4' rx='2' fill='#1F5FA8' /&gt;&lt;text x='82' y='130' fontSize='15.5' fontWeight='bold' fill='#1F5FA8' textAnchor='start' fontFamily='Microsoft YaHei'&gt;2.1 类：从&quot;一堆变量&quot;到&quot;一类事物&quot;&lt;/text&gt;&lt;text x='82' y='169.0' fontSize='13' fill='#3A4A58' textAnchor='start' fontFamily='Microsoft YaHei'&gt;· 类 = 建筑图纸（规定了所有房子有什么：几室几厅、什么材料）&lt;/text&gt;&lt;text x='82' y='197.5' fontSize='13' fill='#3A4A58' textAnchor='start' fontFamily='Microsoft YaHei'&gt;· 对象 = 按图纸盖出来的具体房子（小明家的房子、小红家的房子）&lt;/text&gt;&lt;text x='82' y='226.0' fontSize='13' fill='#3A4A58' textAnchor='start' fontFamily='Microsoft YaHei'&gt;· 属性 = 房子的固有特征（面积、楼层、朝向）&lt;/text&gt;&lt;rect x='668' y='96' width='548' height='330' rx='12' fill='#FFFFFF' stroke='#D8E3EE' /&gt;&lt;rect x='668' y='96' width='548' height='4' rx='2' fill='#1F5FA8' /&gt;&lt;text x='686' y='130' fontSize='15.5' fontWeight='bold' fill='#1F5FA8' textAnchor='start' fontFamily='Microsoft YaHei'&gt;2.2 self：整个 Python 面向对象的核心&lt;/text&gt;&lt;text x='686' y='169.0' fontSize='13' fill='#3A4A58' textAnchor='start' fontFamily='Microsoft YaHei'&gt;· self 到底是什么？&lt;/text&gt;&lt;text x='686' y='197.5' fontSize='13' fill='#3A4A58' textAnchor='start' fontFamily='Microsoft YaHei'&gt;· self = 说话的那个人（&quot;我&quot;）&lt;/text&gt;&lt;text x='686' y='226.0' fontSize='13' fill='#3A4A58' textAnchor='start' fontFamily='Microsoft YaHei'&gt;· self.age = &quot;我的年龄&quot;&lt;/text&gt;&lt;rect x='64' y='574' width='1152' height='66' rx='12' fill='#EEF5FB' /&gt;&lt;text x='84' y='616' fontSize='14' fill='#243444' textAnchor='start' fontFamily='Microsoft YaHei'&gt;看不懂的地方先回讲义对应小节读一遍，再回来对着这页复述一次——能讲出来才算真懂。&lt;/text&gt;&#13;&#10;            &lt;text x='64' y='684' fontSize='13' fill='#8A9AAA' fontFamily='Microsoft YaHei'&gt;Python 讲授课件 · 逐节版&lt;/text&gt;&#13;&#10;            &lt;text x='1216' y='684' fontSize='13' fill='#8A9AAA' textAnchor='end' fontFamily='Microsoft YaHei'&gt;单元 8 · 第 40 节&lt;/text&gt;&#13;&#10;        &lt;/svg&gt;&#13;&#10;    &lt;/Box&gt;&#13;&#10;&lt;/Slide&gt;&#13;&#10;"/>
         <p:cNvGrpSpPr/>
         <p:nvPr/>
       </p:nvGrpSpPr>
@@ -3477,7 +3477,7 @@
   <p:cSld>
     <p:spTree>
       <p:nvGrpSpPr>
-        <p:cNvPr id="81" name="" descr="&lt;Slide style={{ width: '1280px', height: '720px', backgroundColor: '#FAFCFE', padding: 0, position: 'relative', overflow: 'hidden' }}&gt;&#13;&#10;    &lt;Box style={{ position: 'absolute', left: 64, top: 36, width: '1152px', flexDirection: 'row', alignItems: 'center', gap: 12 }}&gt;&#13;&#10;        &lt;Box style={{ background: '#0E9B78', borderRadius: 5, padding: '3px 11px' }}&gt;&#13;&#10;            &lt;Text style={{ fontSize: 14, fontWeight: 'bold', color: '#FFFFFF' }}&gt;第 41 节&lt;/Text&gt;&#13;&#10;        &lt;/Box&gt;&#13;&#10;        &lt;Text style={{ fontSize: 30, fontWeight: 'bold', color: '#16232E' }}&gt;核心知识点&lt;/Text&gt;&#13;&#10;        &lt;Text style={{ fontSize: 15, color: '#5A6B7A', marginTop: 10 }}&gt;· __init__、属性方法与 __str__&lt;/Text&gt;&#13;&#10;    &lt;/Box&gt;&#13;&#10;    &lt;Box style={{ position: 'absolute', left: 0, top: 0, width: '1280px', height: '720px' }}&gt;&#13;&#10;        &lt;svg width='1280' height='720' viewBox='0 0 1280 720'&gt;&#13;&#10;            &lt;rect x='64' y='96' width='368' height='330' rx='12' fill='#FFFFFF' stroke='#D8E3EE' /&gt;&lt;rect x='64' y='96' width='368' height='4' rx='2' fill='#1F5FA8' /&gt;&lt;text x='82' y='130' fontSize='15.5' fontWeight='bold' fill='#1F5FA8' textAnchor='start' fontFamily='Microsoft YaHei'&gt;2.3 __init__：对象的出生证明&lt;/text&gt;&lt;text x='82' y='169.0' fontSize='13' fill='#3A4A58' textAnchor='start' fontFamily='Microsoft YaHei'&gt;· 实例属性 vs 类属性（了解即可）：&lt;/text&gt;&lt;rect x='468' y='96' width='368' height='330' rx='12' fill='#FFFFFF' stroke='#D8E3EE' /&gt;&lt;rect x='468' y='96' width='368' height='4' rx='2' fill='#1F5FA8' /&gt;&lt;text x='486' y='130' fontSize='15.5' fontWeight='bold' fill='#1F5FA8' textAnchor='start' fontFamily='Microsoft YaHei'&gt;2.4 属性 vs 方法&lt;/text&gt;&lt;text x='486' y='169.0' fontSize='13' fill='#3A4A58' textAnchor='start' fontFamily='Microsoft YaHei'&gt;· class Car:&lt;/text&gt;&lt;rect x='872' y='96' width='368' height='330' rx='12' fill='#FFFFFF' stroke='#D8E3EE' /&gt;&lt;rect x='872' y='96' width='368' height='4' rx='2' fill='#1F5FA8' /&gt;&lt;text x='890' y='130' fontSize='15.5' fontWeight='bold' fill='#1F5FA8' textAnchor='start' fontFamily='Microsoft YaHei'&gt;2.5 __str__：让对象能被读懂地打印&lt;/text&gt;&lt;text x='890' y='169.0' fontSize='13' fill='#3A4A58' textAnchor='start' fontFamily='Microsoft YaHei'&gt;· 默认情况下打印对象会得到一段谁也看不懂的东西：&lt;/text&gt;&lt;rect x='64' y='574' width='1152' height='66' rx='12' fill='#EEF5FB' /&gt;&lt;text x='84' y='616' fontSize='14' fill='#243444' textAnchor='start' fontFamily='Microsoft YaHei'&gt;看不懂的地方先回讲义对应小节读一遍，再回来对着这页复述一次——能讲出来才算真懂。&lt;/text&gt;&#13;&#10;            &lt;text x='64' y='684' fontSize='13' fill='#8A9AAA' fontFamily='Microsoft YaHei'&gt;Python 讲授课件 · 逐节版&lt;/text&gt;&#13;&#10;            &lt;text x='1216' y='684' fontSize='13' fill='#8A9AAA' textAnchor='end' fontFamily='Microsoft YaHei'&gt;单元 8 · 第 41 节&lt;/text&gt;&#13;&#10;        &lt;/svg&gt;&#13;&#10;    &lt;/Box&gt;&#13;&#10;&lt;/Slide&gt;&#13;&#10;"/>
+        <p:cNvPr id="81" name="" descr="&lt;Slide style={{ width: '1280px', height: '720px', backgroundColor: '#FAFCFE', padding: 0, position: 'relative', overflow: 'hidden' }}&gt;&#13;&#10;    &lt;Box style={{ position: 'absolute', left: 64, top: 36, width: '1152px', flexDirection: 'row', alignItems: 'center', gap: 12 }}&gt;&#13;&#10;        &lt;Box style={{ background: '#0E9B78', borderRadius: 5, padding: '3px 11px' }}&gt;&#13;&#10;            &lt;Text style={{ fontSize: 14, fontWeight: 'bold', color: '#FFFFFF' }}&gt;第 41 节&lt;/Text&gt;&#13;&#10;        &lt;/Box&gt;&#13;&#10;        &lt;Text style={{ fontSize: 30, fontWeight: 'bold', color: '#16232E' }}&gt;核心知识点&lt;/Text&gt;&#13;&#10;        &lt;Text style={{ fontSize: 15, color: '#5A6B7A', marginTop: 10 }}&gt;· __init__、属性方法与 __str__&lt;/Text&gt;&#13;&#10;    &lt;/Box&gt;&#13;&#10;    &lt;Box style={{ position: 'absolute', left: 0, top: 0, width: '1280px', height: '720px' }}&gt;&#13;&#10;        &lt;svg width='1280' height='720' viewBox='0 0 1280 720'&gt;&#13;&#10;            &lt;rect x='64' y='96' width='368' height='330' rx='12' fill='#FFFFFF' stroke='#D8E3EE' /&gt;&lt;rect x='64' y='96' width='368' height='4' rx='2' fill='#1F5FA8' /&gt;&lt;text x='82' y='130' fontSize='15.5' fontWeight='bold' fill='#1F5FA8' textAnchor='start' fontFamily='Microsoft YaHei'&gt;2.3 __init__：对象的出生证明&lt;/text&gt;&lt;text x='82' y='169.0' fontSize='13' fill='#3A4A58' textAnchor='start' fontFamily='Microsoft YaHei'&gt;· 实例属性 vs 类属性&lt;/text&gt;&lt;rect x='468' y='96' width='368' height='330' rx='12' fill='#FFFFFF' stroke='#D8E3EE' /&gt;&lt;rect x='468' y='96' width='368' height='4' rx='2' fill='#1F5FA8' /&gt;&lt;text x='486' y='130' fontSize='15.5' fontWeight='bold' fill='#1F5FA8' textAnchor='start' fontFamily='Microsoft YaHei'&gt;2.4 属性 vs 方法&lt;/text&gt;&lt;text x='486' y='169.0' fontSize='13' fill='#3A4A58' textAnchor='start' fontFamily='Microsoft YaHei'&gt;· class Car:&lt;/text&gt;&lt;rect x='872' y='96' width='368' height='330' rx='12' fill='#FFFFFF' stroke='#D8E3EE' /&gt;&lt;rect x='872' y='96' width='368' height='4' rx='2' fill='#1F5FA8' /&gt;&lt;text x='890' y='130' fontSize='15.5' fontWeight='bold' fill='#1F5FA8' textAnchor='start' fontFamily='Microsoft YaHei'&gt;2.5 __str__：让对象能被读懂地打印&lt;/text&gt;&lt;text x='890' y='169.0' fontSize='13' fill='#3A4A58' textAnchor='start' fontFamily='Microsoft YaHei'&gt;· 默认情况下打印对象会得到一段谁也看不懂的东西：&lt;/text&gt;&lt;rect x='64' y='574' width='1152' height='66' rx='12' fill='#EEF5FB' /&gt;&lt;text x='84' y='616' fontSize='14' fill='#243444' textAnchor='start' fontFamily='Microsoft YaHei'&gt;看不懂的地方先回讲义对应小节读一遍，再回来对着这页复述一次——能讲出来才算真懂。&lt;/text&gt;&#13;&#10;            &lt;text x='64' y='684' fontSize='13' fill='#8A9AAA' fontFamily='Microsoft YaHei'&gt;Python 讲授课件 · 逐节版&lt;/text&gt;&#13;&#10;            &lt;text x='1216' y='684' fontSize='13' fill='#8A9AAA' textAnchor='end' fontFamily='Microsoft YaHei'&gt;单元 8 · 第 41 节&lt;/text&gt;&#13;&#10;        &lt;/svg&gt;&#13;&#10;    &lt;/Box&gt;&#13;&#10;&lt;/Slide&gt;&#13;&#10;"/>
         <p:cNvGrpSpPr/>
         <p:nvPr/>
       </p:nvGrpSpPr>
@@ -3918,7 +3918,7 @@
   <p:cSld>
     <p:spTree>
       <p:nvGrpSpPr>
-        <p:cNvPr id="94" name="" descr="&lt;Slide style={{ width: '1280px', height: '720px', backgroundColor: '#FAFCFE', padding: 0, position: 'relative', overflow: 'hidden' }}&gt;&#13;&#10;    &lt;Box style={{ position: 'absolute', left: 64, top: 36, width: '1152px', flexDirection: 'row', alignItems: 'center', gap: 12 }}&gt;&#13;&#10;        &lt;Box style={{ background: '#0E9B78', borderRadius: 5, padding: '3px 11px' }}&gt;&#13;&#10;            &lt;Text style={{ fontSize: 14, fontWeight: 'bold', color: '#FFFFFF' }}&gt;第 42 节&lt;/Text&gt;&#13;&#10;        &lt;/Box&gt;&#13;&#10;        &lt;Text style={{ fontSize: 30, fontWeight: 'bold', color: '#16232E' }}&gt;核心知识点&lt;/Text&gt;&#13;&#10;        &lt;Text style={{ fontSize: 15, color: '#5A6B7A', marginTop: 10 }}&gt;· 继承与方法重写&lt;/Text&gt;&#13;&#10;    &lt;/Box&gt;&#13;&#10;    &lt;Box style={{ position: 'absolute', left: 0, top: 0, width: '1280px', height: '720px' }}&gt;&#13;&#10;        &lt;svg width='1280' height='720' viewBox='0 0 1280 720'&gt;&#13;&#10;            &lt;rect x='64' y='96' width='548' height='330' rx='12' fill='#FFFFFF' stroke='#D8E3EE' /&gt;&lt;rect x='64' y='96' width='548' height='4' rx='2' fill='#1F5FA8' /&gt;&lt;text x='82' y='130' fontSize='15.5' fontWeight='bold' fill='#1F5FA8' textAnchor='start' fontFamily='Microsoft YaHei'&gt;2.6 继承：不重复造轮子&lt;/text&gt;&lt;text x='82' y='169.0' fontSize='13' fill='#3A4A58' textAnchor='start' fontFamily='Microsoft YaHei'&gt;· 继承解决的是这个问题：&lt;/text&gt;&lt;text x='82' y='197.5' fontSize='13' fill='#3A4A58' textAnchor='start' fontFamily='Microsoft YaHei'&gt;· 三个要点：&lt;/text&gt;&lt;text x='82' y='226.0' fontSize='13' fill='#3A4A58' textAnchor='start' fontFamily='Microsoft YaHei'&gt;· 关于 super() 的一个实用提醒：super().__init__() 必须放在自己赋值属性之前…&lt;/text&gt;&lt;rect x='668' y='96' width='548' height='330' rx='12' fill='#FFFFFF' stroke='#D8E3EE' /&gt;&lt;rect x='668' y='96' width='548' height='4' rx='2' fill='#1F5FA8' /&gt;&lt;text x='686' y='130' fontSize='15.5' fontWeight='bold' fill='#1F5FA8' textAnchor='start' fontFamily='Microsoft YaHei'&gt;2.7 方法重写与多态&lt;/text&gt;&lt;text x='686' y='169.0' fontSize='13' fill='#3A4A58' textAnchor='start' fontFamily='Microsoft YaHei'&gt;· 多态（polymorphism） 是重写带来的最大好处：调用代码不需要知道对象的真实类型&lt;/text&gt;&lt;text x='686' y='188.5' fontSize='13' fill='#3A4A58' textAnchor='start' fontFamily='Microsoft YaHei'&gt;。&lt;/text&gt;&lt;rect x='64' y='574' width='1152' height='66' rx='12' fill='#EEF5FB' /&gt;&lt;text x='84' y='616' fontSize='14' fill='#243444' textAnchor='start' fontFamily='Microsoft YaHei'&gt;看不懂的地方先回讲义对应小节读一遍，再回来对着这页复述一次——能讲出来才算真懂。&lt;/text&gt;&#13;&#10;            &lt;text x='64' y='684' fontSize='13' fill='#8A9AAA' fontFamily='Microsoft YaHei'&gt;Python 讲授课件 · 逐节版&lt;/text&gt;&#13;&#10;            &lt;text x='1216' y='684' fontSize='13' fill='#8A9AAA' textAnchor='end' fontFamily='Microsoft YaHei'&gt;单元 8 · 第 42 节&lt;/text&gt;&#13;&#10;        &lt;/svg&gt;&#13;&#10;    &lt;/Box&gt;&#13;&#10;&lt;/Slide&gt;&#13;&#10;"/>
+        <p:cNvPr id="94" name="" descr="&lt;Slide style={{ width: '1280px', height: '720px', backgroundColor: '#FAFCFE', padding: 0, position: 'relative', overflow: 'hidden' }}&gt;&#13;&#10;    &lt;Box style={{ position: 'absolute', left: 64, top: 36, width: '1152px', flexDirection: 'row', alignItems: 'center', gap: 12 }}&gt;&#13;&#10;        &lt;Box style={{ background: '#0E9B78', borderRadius: 5, padding: '3px 11px' }}&gt;&#13;&#10;            &lt;Text style={{ fontSize: 14, fontWeight: 'bold', color: '#FFFFFF' }}&gt;第 42 节&lt;/Text&gt;&#13;&#10;        &lt;/Box&gt;&#13;&#10;        &lt;Text style={{ fontSize: 30, fontWeight: 'bold', color: '#16232E' }}&gt;核心知识点&lt;/Text&gt;&#13;&#10;        &lt;Text style={{ fontSize: 15, color: '#5A6B7A', marginTop: 10 }}&gt;· 继承与方法重写&lt;/Text&gt;&#13;&#10;    &lt;/Box&gt;&#13;&#10;    &lt;Box style={{ position: 'absolute', left: 0, top: 0, width: '1280px', height: '720px' }}&gt;&#13;&#10;        &lt;svg width='1280' height='720' viewBox='0 0 1280 720'&gt;&#13;&#10;            &lt;rect x='64' y='96' width='368' height='330' rx='12' fill='#FFFFFF' stroke='#D8E3EE' /&gt;&lt;rect x='64' y='96' width='368' height='4' rx='2' fill='#1F5FA8' /&gt;&lt;text x='82' y='130' fontSize='15.5' fontWeight='bold' fill='#1F5FA8' textAnchor='start' fontFamily='Microsoft YaHei'&gt;2.6 继承：不重复造轮子&lt;/text&gt;&lt;text x='82' y='169.0' fontSize='13' fill='#3A4A58' textAnchor='start' fontFamily='Microsoft YaHei'&gt;· 继承解决的是这个问题&lt;/text&gt;&lt;text x='82' y='197.5' fontSize='13' fill='#3A4A58' textAnchor='start' fontFamily='Microsoft YaHei'&gt;· 三个要点&lt;/text&gt;&lt;text x='82' y='226.0' fontSize='13' fill='#3A4A58' textAnchor='start' fontFamily='Microsoft YaHei'&gt;· 关于 super() 的一个实用提醒&lt;/text&gt;&lt;rect x='468' y='96' width='368' height='330' rx='12' fill='#FFFFFF' stroke='#D8E3EE' /&gt;&lt;rect x='468' y='96' width='368' height='4' rx='2' fill='#1F5FA8' /&gt;&lt;text x='486' y='130' fontSize='15.5' fontWeight='bold' fill='#1F5FA8' textAnchor='start' fontFamily='Microsoft YaHei'&gt;2.7 方法重写与多态&lt;/text&gt;&lt;text x='486' y='169.0' fontSize='13' fill='#3A4A58' textAnchor='start' fontFamily='Microsoft YaHei'&gt;· 多态（polymorphism）&lt;/text&gt;&lt;rect x='872' y='96' width='368' height='330' rx='12' fill='#FFFFFF' stroke='#D8E3EE' /&gt;&lt;rect x='872' y='96' width='368' height='4' rx='2' fill='#1F5FA8' /&gt;&lt;text x='890' y='130' fontSize='15.5' fontWeight='bold' fill='#1F5FA8' textAnchor='start' fontFamily='Microsoft YaHei'&gt;2.8 导入类与 Python 标准库（教材 9.4 /…&lt;/text&gt;&lt;text x='890' y='169.0' fontSize='13' fill='#3A4A58' textAnchor='start' fontFamily='Microsoft YaHei'&gt;· 一、类也可以拆到文件里。&lt;/text&gt;&lt;text x='890' y='197.5' fontSize='13' fill='#3A4A58' textAnchor='start' fontFamily='Microsoft YaHei'&gt;· 二、标准库：不用装，import 就能用。&lt;/text&gt;&lt;text x='890' y='226.0' fontSize='13' fill='#3A4A58' textAnchor='start' fontFamily='Microsoft YaHei'&gt;· 三、随机要能复现。&lt;/text&gt;&lt;rect x='64' y='574' width='1152' height='66' rx='12' fill='#EEF5FB' /&gt;&lt;text x='84' y='616' fontSize='14' fill='#243444' textAnchor='start' fontFamily='Microsoft YaHei'&gt;看不懂的地方先回讲义对应小节读一遍，再回来对着这页复述一次——能讲出来才算真懂。&lt;/text&gt;&#13;&#10;            &lt;text x='64' y='684' fontSize='13' fill='#8A9AAA' fontFamily='Microsoft YaHei'&gt;Python 讲授课件 · 逐节版&lt;/text&gt;&#13;&#10;            &lt;text x='1216' y='684' fontSize='13' fill='#8A9AAA' textAnchor='end' fontFamily='Microsoft YaHei'&gt;单元 8 · 第 42 节&lt;/text&gt;&#13;&#10;        &lt;/svg&gt;&#13;&#10;    &lt;/Box&gt;&#13;&#10;&lt;/Slide&gt;&#13;&#10;"/>
         <p:cNvGrpSpPr/>
         <p:nvPr/>
       </p:nvGrpSpPr>

--- a/python-course-ppt/逐节课件/Python讲授课件-单元08.pptx
+++ b/python-course-ppt/逐节课件/Python讲授课件-单元08.pptx
@@ -559,7 +559,7 @@
   <p:cSld>
     <p:spTree>
       <p:nvGrpSpPr>
-        <p:cNvPr id="1" name="" descr="&lt;Slide style={{ width: '1280px', height: '720px', backgroundColor: '#FAFCFE', padding: 0, position: 'relative', overflow: 'hidden' }}&gt;&#13;&#10;    &lt;Box style={{ position: 'absolute', left: 0, top: 0, width: '1280px', height: '150px', background: '#1F5FA8' }} /&gt;&#13;&#10;    &lt;Box style={{ position: 'absolute', left: 64, top: 34, width: '1152px', flexDirection: 'column' }}&gt;&#13;&#10;        &lt;Text style={{ fontSize: 15, fontWeight: 'bold', color: '#BFD9F2', letterSpacing: 2 }}&gt;阶段 1 · 单元 8&lt;/Text&gt;&#13;&#10;        &lt;Text style={{ fontSize: 38, fontWeight: 'bold', color: '#FFFFFF', marginTop: 6 }}&gt;类&lt;/Text&gt;&#13;&#10;    &lt;/Box&gt;&#13;&#10;    &lt;Box style={{ position: 'absolute', left: 64, top: 168, width: '1152px', height: 470 }}&gt;&#13;&#10;        &lt;svg width='1152' height='470' viewBox='0 0 1152 470'&gt;&#13;&#10;            &lt;text x='0' y='18' fontSize='15' fontWeight='bold' fill='#16232E' fontFamily='Microsoft YaHei'&gt;本单元共 7 节课&lt;/text&gt;&#13;&#10;            &lt;rect x='0' y='196' width='1152' height='38' rx='7' fill='#FFFFFF' /&gt;&lt;text x='16' y='221' fontSize='15' fontWeight='bold' fill='#1F5FA8' fontFamily='Microsoft YaHei'&gt;第 40 节&lt;/text&gt;&lt;text x='96' y='221' fontSize='15' fill='#16232E' fontFamily='Microsoft YaHei'&gt;类、实例与 self&lt;/text&gt;&lt;text x='1080' y='221' fontSize='13' fill='#5A6B7A' textAnchor='end' fontFamily='Microsoft YaHei'&gt;W9&lt;/text&gt;&lt;rect x='0' y='238' width='1152' height='38' rx='7' fill='#F2F7FD' /&gt;&lt;text x='16' y='263' fontSize='15' fontWeight='bold' fill='#1F5FA8' fontFamily='Microsoft YaHei'&gt;第 41 节&lt;/text&gt;&lt;text x='96' y='263' fontSize='15' fill='#16232E' fontFamily='Microsoft YaHei'&gt;__init__、属性方法与 __str__&lt;/text&gt;&lt;text x='1080' y='263' fontSize='13' fill='#5A6B7A' textAnchor='end' fontFamily='Microsoft YaHei'&gt;W9&lt;/text&gt;&lt;rect x='0' y='280' width='1152' height='38' rx='7' fill='#FFFFFF' /&gt;&lt;text x='16' y='305' fontSize='15' fontWeight='bold' fill='#1F5FA8' fontFamily='Microsoft YaHei'&gt;第 42 节&lt;/text&gt;&lt;text x='96' y='305' fontSize='15' fill='#16232E' fontFamily='Microsoft YaHei'&gt;继承与方法重写&lt;/text&gt;&lt;text x='1080' y='305' fontSize='13' fill='#5A6B7A' textAnchor='end' fontFamily='Microsoft YaHei'&gt;W9&lt;/text&gt;&lt;rect x='0' y='322' width='1152' height='38' rx='7' fill='#F2F7FD' /&gt;&lt;text x='16' y='347' fontSize='15' fontWeight='bold' fill='#1F5FA8' fontFamily='Microsoft YaHei'&gt;第 43 节&lt;/text&gt;&lt;text x='96' y='347' fontSize='15' fill='#16232E' fontFamily='Microsoft YaHei'&gt;类的组合与示例串讲&lt;/text&gt;&lt;text x='1080' y='347' fontSize='13' fill='#5A6B7A' textAnchor='end' fontFamily='Microsoft YaHei'&gt;W9&lt;/text&gt;&lt;rect x='0' y='364' width='1152' height='38' rx='7' fill='#FFFFFF' /&gt;&lt;text x='16' y='389' fontSize='15' fontWeight='bold' fill='#1F5FA8' fontFamily='Microsoft YaHei'&gt;第 44 节&lt;/text&gt;&lt;text x='96' y='389' fontSize='15' fill='#16232E' fontFamily='Microsoft YaHei'&gt;动手实战与答案讲评&lt;/text&gt;&lt;text x='1080' y='389' fontSize='13' fill='#5A6B7A' textAnchor='end' fontFamily='Microsoft YaHei'&gt;W9&lt;/text&gt;&lt;rect x='0' y='406' width='1152' height='38' rx='7' fill='#F2F7FD' /&gt;&lt;text x='16' y='431' fontSize='15' fontWeight='bold' fill='#1F5FA8' fontFamily='Microsoft YaHei'&gt;第 45 节&lt;/text&gt;&lt;text x='96' y='431' fontSize='15' fill='#16232E' fontFamily='Microsoft YaHei'&gt;★ 六个常见错误逐条自查&lt;/text&gt;&lt;text x='1080' y='431' fontSize='13' fill='#5A6B7A' textAnchor='end' fontFamily='Microsoft YaHei'&gt;W9&lt;/text&gt;&lt;rect x='0' y='448' width='1152' height='38' rx='7' fill='#FFFFFF' /&gt;&lt;text x='16' y='473' fontSize='15' fontWeight='bold' fill='#1F5FA8' fontFamily='Microsoft YaHei'&gt;第 46 节&lt;/text&gt;&lt;text x='96' y='473' fontSize='15' fill='#16232E' fontFamily='Microsoft YaHei'&gt;单元 8 验收复盘&lt;/text&gt;&lt;text x='1080' y='473' fontSize='13' fill='#5A6B7A' textAnchor='end' fontFamily='Microsoft YaHei'&gt;W9&lt;/text&gt;&#13;&#10;        &lt;/svg&gt;&#13;&#10;    &lt;/Box&gt;&#13;&#10;    &lt;Box style={{ position: 'absolute', left: 64, bottom: 22, width: '1152px', flexDirection: 'row', justifyContent: 'space-between' }}&gt;&#13;&#10;        &lt;Text style={{ fontSize: 13, color: '#8A9AAA' }}&gt;Python 讲授课件 · 逐节版&lt;/Text&gt;&#13;&#10;        &lt;Text style={{ fontSize: 13, color: '#8A9AAA' }}&gt;单元 8 · 封面&lt;/Text&gt;&#13;&#10;    &lt;/Box&gt;&#13;&#10;&lt;/Slide&gt;&#13;&#10;"/>
+        <p:cNvPr id="1" name="" descr="&lt;Slide style={{ width: '1280px', height: '720px', backgroundColor: '#FAFCFE', padding: 0, position: 'relative', overflow: 'hidden' }}&gt;&#13;&#10;    &lt;Box style={{ position: 'absolute', left: 0, top: 0, width: '1280px', height: '150px', background: '#1F5FA8' }} /&gt;&#13;&#10;    &lt;Box style={{ position: 'absolute', left: 64, top: 34, width: '1152px', flexDirection: 'column' }}&gt;&#13;&#10;        &lt;Text style={{ fontSize: 15, fontWeight: 'bold', color: '#BFD9F2', letterSpacing: 2 }}&gt;阶段 1 · 单元 8&lt;/Text&gt;&#13;&#10;        &lt;Text style={{ fontSize: 38, fontWeight: 'bold', color: '#FFFFFF', marginTop: 6 }}&gt;类&lt;/Text&gt;&#13;&#10;    &lt;/Box&gt;&#13;&#10;    &lt;Box style={{ position: 'absolute', left: 64, top: 168, width: '1152px', height: 470 }}&gt;&#13;&#10;        &lt;svg width='1152' height='470' viewBox='0 0 1152 470'&gt;&#13;&#10;            &lt;text x='0' y='18' fontSize='15' fontWeight='bold' fill='#16232E' fontFamily='Microsoft YaHei'&gt;本单元共 7 节课&lt;/text&gt;&#13;&#10;            &lt;rect x='0' y='56.0' width='1152' height='46.6' rx='7' fill='#FFFFFF' /&gt;&lt;text x='16' y='84.3' fontSize='15' fontWeight='bold' fill='#1F5FA8' fontFamily='Microsoft YaHei'&gt;第 40 节&lt;/text&gt;&lt;text x='96' y='84.3' fontSize='15' fill='#16232E' fontFamily='Microsoft YaHei'&gt;类、实例与 self&lt;/text&gt;&lt;text x='1080' y='84.3' fontSize='13' fill='#5A6B7A' textAnchor='end' fontFamily='Microsoft YaHei'&gt;W9&lt;/text&gt;&lt;rect x='0' y='112.6' width='1152' height='46.6' rx='7' fill='#F2F7FD' /&gt;&lt;text x='16' y='140.9' fontSize='15' fontWeight='bold' fill='#1F5FA8' fontFamily='Microsoft YaHei'&gt;第 41 节&lt;/text&gt;&lt;text x='96' y='140.9' fontSize='15' fill='#16232E' fontFamily='Microsoft YaHei'&gt;__init__、属性方法与 __str__&lt;/text&gt;&lt;text x='1080' y='140.9' fontSize='13' fill='#5A6B7A' textAnchor='end' fontFamily='Microsoft YaHei'&gt;W9&lt;/text&gt;&lt;rect x='0' y='169.1' width='1152' height='46.6' rx='7' fill='#FFFFFF' /&gt;&lt;text x='16' y='197.4' fontSize='15' fontWeight='bold' fill='#1F5FA8' fontFamily='Microsoft YaHei'&gt;第 42 节&lt;/text&gt;&lt;text x='96' y='197.4' fontSize='15' fill='#16232E' fontFamily='Microsoft YaHei'&gt;继承与方法重写&lt;/text&gt;&lt;text x='1080' y='197.4' fontSize='13' fill='#5A6B7A' textAnchor='end' fontFamily='Microsoft YaHei'&gt;W9&lt;/text&gt;&lt;rect x='0' y='225.7' width='1152' height='46.6' rx='7' fill='#F2F7FD' /&gt;&lt;text x='16' y='254.0' fontSize='15' fontWeight='bold' fill='#1F5FA8' fontFamily='Microsoft YaHei'&gt;第 43 节&lt;/text&gt;&lt;text x='96' y='254.0' fontSize='15' fill='#16232E' fontFamily='Microsoft YaHei'&gt;类的组合与示例串讲&lt;/text&gt;&lt;text x='1080' y='254.0' fontSize='13' fill='#5A6B7A' textAnchor='end' fontFamily='Microsoft YaHei'&gt;W9&lt;/text&gt;&lt;rect x='0' y='282.3' width='1152' height='46.6' rx='7' fill='#FFFFFF' /&gt;&lt;text x='16' y='310.6' fontSize='15' fontWeight='bold' fill='#1F5FA8' fontFamily='Microsoft YaHei'&gt;第 44 节&lt;/text&gt;&lt;text x='96' y='310.6' fontSize='15' fill='#16232E' fontFamily='Microsoft YaHei'&gt;动手实战与答案讲评&lt;/text&gt;&lt;text x='1080' y='310.6' fontSize='13' fill='#5A6B7A' textAnchor='end' fontFamily='Microsoft YaHei'&gt;W9&lt;/text&gt;&lt;rect x='0' y='338.9' width='1152' height='46.6' rx='7' fill='#F2F7FD' /&gt;&lt;text x='16' y='367.1' fontSize='15' fontWeight='bold' fill='#1F5FA8' fontFamily='Microsoft YaHei'&gt;第 45 节&lt;/text&gt;&lt;text x='96' y='367.1' fontSize='15' fill='#16232E' fontFamily='Microsoft YaHei'&gt;★ 六个常见错误逐条自查&lt;/text&gt;&lt;text x='1080' y='367.1' fontSize='13' fill='#5A6B7A' textAnchor='end' fontFamily='Microsoft YaHei'&gt;W9&lt;/text&gt;&lt;rect x='0' y='395.4' width='1152' height='46.6' rx='7' fill='#FFFFFF' /&gt;&lt;text x='16' y='423.7' fontSize='15' fontWeight='bold' fill='#1F5FA8' fontFamily='Microsoft YaHei'&gt;第 46 节&lt;/text&gt;&lt;text x='96' y='423.7' fontSize='15' fill='#16232E' fontFamily='Microsoft YaHei'&gt;单元 8 验收复盘&lt;/text&gt;&lt;text x='1080' y='423.7' fontSize='13' fill='#5A6B7A' textAnchor='end' fontFamily='Microsoft YaHei'&gt;W9&lt;/text&gt;&#13;&#10;        &lt;/svg&gt;&#13;&#10;    &lt;/Box&gt;&#13;&#10;    &lt;Box style={{ position: 'absolute', left: 64, bottom: 22, width: '1152px', flexDirection: 'row', justifyContent: 'space-between' }}&gt;&#13;&#10;        &lt;Text style={{ fontSize: 13, color: '#8A9AAA' }}&gt;Python 讲授课件 · 逐节版&lt;/Text&gt;&#13;&#10;        &lt;Text style={{ fontSize: 13, color: '#8A9AAA' }}&gt;单元 8 · 封面&lt;/Text&gt;&#13;&#10;    &lt;/Box&gt;&#13;&#10;&lt;/Slide&gt;&#13;&#10;"/>
         <p:cNvGrpSpPr/>
         <p:nvPr/>
       </p:nvGrpSpPr>
@@ -1073,7 +1073,7 @@
   <p:cSld>
     <p:spTree>
       <p:nvGrpSpPr>
-        <p:cNvPr id="15" name="" descr="&lt;Slide style={{ width: '1280px', height: '720px', backgroundColor: '#FAFCFE', padding: 0, position: 'relative', overflow: 'hidden' }}&gt;&#13;&#10;    &lt;Box style={{ position: 'absolute', left: 64, top: 36, width: '1152px', flexDirection: 'row', alignItems: 'center', gap: 12 }}&gt;&#13;&#10;        &lt;Box style={{ background: '#0E9B78', borderRadius: 5, padding: '3px 11px' }}&gt;&#13;&#10;            &lt;Text style={{ fontSize: 14, fontWeight: 'bold', color: '#FFFFFF' }}&gt;第 44 节&lt;/Text&gt;&#13;&#10;        &lt;/Box&gt;&#13;&#10;        &lt;Text style={{ fontSize: 30, fontWeight: 'bold', color: '#16232E' }}&gt;核心知识点&lt;/Text&gt;&#13;&#10;        &lt;Text style={{ fontSize: 15, color: '#5A6B7A', marginTop: 10 }}&gt;· 动手实战与答案讲评&lt;/Text&gt;&#13;&#10;    &lt;/Box&gt;&#13;&#10;    &lt;Box style={{ position: 'absolute', left: 0, top: 0, width: '1280px', height: '720px' }}&gt;&#13;&#10;        &lt;svg width='1280' height='720' viewBox='0 0 1280 720'&gt;&#13;&#10;            &lt;rect x='64' y='96' width='368' height='330' rx='12' fill='#FFFFFF' stroke='#D8E3EE' /&gt;&lt;rect x='64' y='96' width='368' height='4' rx='2' fill='#1F5FA8' /&gt;&lt;text x='82' y='130' fontSize='15.5' fontWeight='bold' fill='#1F5FA8' textAnchor='start' fontFamily='Microsoft YaHei'&gt;基础档&lt;/text&gt;&lt;text x='82' y='169.0' fontSize='13' fill='#3A4A58' textAnchor='start' fontFamily='Microsoft YaHei'&gt;· 练习 8-1【Dog 类】&lt;/text&gt;&lt;text x='82' y='197.5' fontSize='13' fill='#3A4A58' textAnchor='start' fontFamily='Microsoft YaHei'&gt;· 属性：name（名字）、age（年龄，默认 1）&lt;/text&gt;&lt;text x='82' y='226.0' fontSize='13' fill='#3A4A58' textAnchor='start' fontFamily='Microsoft YaHei'&gt;· __init__：设置初始属性&lt;/text&gt;&lt;rect x='468' y='96' width='368' height='330' rx='12' fill='#FFFFFF' stroke='#D8E3EE' /&gt;&lt;rect x='468' y='96' width='368' height='4' rx='2' fill='#1F5FA8' /&gt;&lt;text x='486' y='130' fontSize='15.5' fontWeight='bold' fill='#1F5FA8' textAnchor='start' fontFamily='Microsoft YaHei'&gt;进阶档&lt;/text&gt;&lt;text x='486' y='169.0' fontSize='13' fill='#3A4A58' textAnchor='start' fontFamily='Microsoft YaHei'&gt;· 练习 8-5【★ 继承与重写】&lt;/text&gt;&lt;text x='486' y='197.5' fontSize='13' fill='#3A4A58' textAnchor='start' fontFamily='Microsoft YaHei'&gt;· 属性：name&lt;/text&gt;&lt;text x='486' y='226.0' fontSize='13' fill='#3A4A58' textAnchor='start' fontFamily='Microsoft YaHei'&gt;· area()：输出&quot;需要子类重写这个方法&quot;，返回 None&lt;/text&gt;&lt;rect x='872' y='96' width='368' height='330' rx='12' fill='#FFFFFF' stroke='#D8E3EE' /&gt;&lt;rect x='872' y='96' width='368' height='4' rx='2' fill='#1F5FA8' /&gt;&lt;text x='890' y='130' fontSize='15.5' fontWeight='bold' fill='#1F5FA8' textAnchor='start' fontFamily='Microsoft YaHei'&gt;参考答案 8-1&lt;/text&gt;&lt;text x='890' y='169.0' fontSize='13' fill='#3A4A58' textAnchor='start' fontFamily='Microsoft YaHei'&gt;· class Dog:&lt;/text&gt;&lt;rect x='64' y='574' width='1152' height='66' rx='12' fill='#EEF5FB' /&gt;&lt;text x='84' y='616' fontSize='14' fill='#243444' textAnchor='start' fontFamily='Microsoft YaHei'&gt;看不懂的地方先回讲义对应小节读一遍，再回来对着这页复述一次——能讲出来才算真懂。&lt;/text&gt;&#13;&#10;            &lt;text x='64' y='684' fontSize='13' fill='#8A9AAA' fontFamily='Microsoft YaHei'&gt;Python 讲授课件 · 逐节版&lt;/text&gt;&#13;&#10;            &lt;text x='1216' y='684' fontSize='13' fill='#8A9AAA' textAnchor='end' fontFamily='Microsoft YaHei'&gt;单元 8 · 第 44 节&lt;/text&gt;&#13;&#10;        &lt;/svg&gt;&#13;&#10;    &lt;/Box&gt;&#13;&#10;&lt;/Slide&gt;&#13;&#10;"/>
+        <p:cNvPr id="15" name="" descr="&lt;Slide style={{ width: '1280px', height: '720px', backgroundColor: '#FAFCFE', padding: 0, position: 'relative', overflow: 'hidden' }}&gt;&#13;&#10;    &lt;Box style={{ position: 'absolute', left: 64, top: 36, width: '1152px', flexDirection: 'row', alignItems: 'center', gap: 12 }}&gt;&#13;&#10;        &lt;Box style={{ background: '#0E9B78', borderRadius: 5, padding: '3px 11px' }}&gt;&#13;&#10;            &lt;Text style={{ fontSize: 14, fontWeight: 'bold', color: '#FFFFFF' }}&gt;第 44 节&lt;/Text&gt;&#13;&#10;        &lt;/Box&gt;&#13;&#10;        &lt;Text style={{ fontSize: 30, fontWeight: 'bold', color: '#16232E' }}&gt;核心知识点&lt;/Text&gt;&#13;&#10;        &lt;Text style={{ fontSize: 15, color: '#5A6B7A', marginTop: 10 }}&gt;· 动手实战与答案讲评&lt;/Text&gt;&#13;&#10;    &lt;/Box&gt;&#13;&#10;    &lt;Box style={{ position: 'absolute', left: 0, top: 0, width: '1280px', height: '720px' }}&gt;&#13;&#10;        &lt;svg width='1280' height='720' viewBox='0 0 1280 720'&gt;&#13;&#10;            &lt;rect x='64' y='96' width='368' height='330' rx='12' fill='#FFFFFF' stroke='#D8E3EE' /&gt;&lt;rect x='64' y='96' width='368' height='4' rx='2' fill='#1F5FA8' /&gt;&lt;text x='82' y='130' fontSize='15.5' fontWeight='bold' fill='#1F5FA8' textAnchor='start' fontFamily='Microsoft YaHei'&gt;基础档&lt;/text&gt;&lt;text x='82' y='169.0' fontSize='13' fill='#3A4A58' textAnchor='start' fontFamily='Microsoft YaHei'&gt;· 练习 8-1【Dog 类】&lt;/text&gt;&lt;text x='82' y='197.5' fontSize='13' fill='#3A4A58' textAnchor='start' fontFamily='Microsoft YaHei'&gt;· 属性：name（名字）、age（年龄，默认 1）&lt;/text&gt;&lt;text x='82' y='226.0' fontSize='13' fill='#3A4A58' textAnchor='start' fontFamily='Microsoft YaHei'&gt;· __init__：设置初始属性&lt;/text&gt;&lt;rect x='468' y='96' width='368' height='330' rx='12' fill='#FFFFFF' stroke='#D8E3EE' /&gt;&lt;rect x='468' y='96' width='368' height='4' rx='2' fill='#1F5FA8' /&gt;&lt;text x='486' y='130' fontSize='15.5' fontWeight='bold' fill='#1F5FA8' textAnchor='start' fontFamily='Microsoft YaHei'&gt;进阶档&lt;/text&gt;&lt;text x='486' y='169.0' fontSize='13' fill='#3A4A58' textAnchor='start' fontFamily='Microsoft YaHei'&gt;· 练习 8-5【★ 继承与重写】&lt;/text&gt;&lt;text x='486' y='197.5' fontSize='13' fill='#3A4A58' textAnchor='start' fontFamily='Microsoft YaHei'&gt;· 属性：name&lt;/text&gt;&lt;text x='486' y='226.0' fontSize='13' fill='#3A4A58' textAnchor='start' fontFamily='Microsoft YaHei'&gt;· area()：输出&quot;需要子类重写这个方法&quot;，返回 None&lt;/text&gt;&lt;rect x='872' y='96' width='368' height='330' rx='12' fill='#FFFFFF' stroke='#D8E3EE' /&gt;&lt;rect x='872' y='96' width='368' height='4' rx='2' fill='#1F5FA8' /&gt;&lt;text x='890' y='130' fontSize='15.5' fontWeight='bold' fill='#1F5FA8' textAnchor='start' fontFamily='Microsoft YaHei'&gt;参考答案 8-9&lt;/text&gt;&lt;text x='890' y='169.0' fontSize='13' fill='#3A4A58' textAnchor='start' fontFamily='Microsoft YaHei'&gt;· 为什么不用 random.choices：choices&lt;/text&gt;&lt;text x='890' y='188.5' fontSize='13' fill='#3A4A58' textAnchor='start' fontFamily='Microsoft YaHei'&gt;是有放回抽样…&lt;/text&gt;&lt;rect x='64' y='574' width='1152' height='66' rx='12' fill='#EEF5FB' /&gt;&lt;text x='84' y='616' fontSize='14' fill='#243444' textAnchor='start' fontFamily='Microsoft YaHei'&gt;看不懂的地方先回讲义对应小节读一遍，再回来对着这页复述一次——能讲出来才算真懂。&lt;/text&gt;&#13;&#10;            &lt;text x='64' y='684' fontSize='13' fill='#8A9AAA' fontFamily='Microsoft YaHei'&gt;Python 讲授课件 · 逐节版&lt;/text&gt;&#13;&#10;            &lt;text x='1216' y='684' fontSize='13' fill='#8A9AAA' textAnchor='end' fontFamily='Microsoft YaHei'&gt;单元 8 · 第 44 节&lt;/text&gt;&#13;&#10;        &lt;/svg&gt;&#13;&#10;    &lt;/Box&gt;&#13;&#10;&lt;/Slide&gt;&#13;&#10;"/>
         <p:cNvGrpSpPr/>
         <p:nvPr/>
       </p:nvGrpSpPr>
@@ -1514,7 +1514,7 @@
   <p:cSld>
     <p:spTree>
       <p:nvGrpSpPr>
-        <p:cNvPr id="28" name="" descr="&lt;Slide style={{ width: '1280px', height: '720px', backgroundColor: '#FAFCFE', padding: 0, position: 'relative', overflow: 'hidden' }}&gt;&#13;&#10;    &lt;Box style={{ position: 'absolute', left: 64, top: 36, width: '1152px', flexDirection: 'row', alignItems: 'center', gap: 12 }}&gt;&#13;&#10;        &lt;Box style={{ background: '#0E9B78', borderRadius: 5, padding: '3px 11px' }}&gt;&#13;&#10;            &lt;Text style={{ fontSize: 14, fontWeight: 'bold', color: '#FFFFFF' }}&gt;第 45 节&lt;/Text&gt;&#13;&#10;        &lt;/Box&gt;&#13;&#10;        &lt;Text style={{ fontSize: 30, fontWeight: 'bold', color: '#16232E' }}&gt;核心知识点&lt;/Text&gt;&#13;&#10;        &lt;Text style={{ fontSize: 15, color: '#5A6B7A', marginTop: 10 }}&gt;· ★ 六个常见错误逐条自查&lt;/Text&gt;&#13;&#10;    &lt;/Box&gt;&#13;&#10;    &lt;Box style={{ position: 'absolute', left: 0, top: 0, width: '1280px', height: '720px' }}&gt;&#13;&#10;        &lt;svg width='1280' height='720' viewBox='0 0 1280 720'&gt;&#13;&#10;            &lt;rect x='64' y='96' width='368' height='330' rx='12' fill='#FFFFFF' stroke='#D8E3EE' /&gt;&lt;rect x='64' y='96' width='368' height='4' rx='2' fill='#1F5FA8' /&gt;&lt;text x='82' y='130' fontSize='15.5' fontWeight='bold' fill='#1F5FA8' textAnchor='start' fontFamily='Microsoft YaHei'&gt;错误 1：★ 方法忘记写 self&lt;/text&gt;&lt;text x='82' y='169.0' fontSize='13' fill='#3A4A58' textAnchor='start' fontFamily='Microsoft YaHei'&gt;· NameError: name 'count' is not&lt;/text&gt;&lt;text x='82' y='188.5' fontSize='13' fill='#3A4A58' textAnchor='start' fontFamily='Microsoft YaHei'&gt;defined（左边忘了写）&lt;/text&gt;&lt;text x='82' y='217.0' fontSize='13' fill='#3A4A58' textAnchor='start' fontFamily='Microsoft YaHei'&gt;· 属性值永远不变 / 方法结束后&quot;数据丢了&quot;&lt;/text&gt;&lt;text x='82' y='245.5' fontSize='13' fill='#3A4A58' textAnchor='start' fontFamily='Microsoft YaHei'&gt;· 属性变成 None 或 0&lt;/text&gt;&lt;rect x='468' y='96' width='368' height='330' rx='12' fill='#FFFFFF' stroke='#D8E3EE' /&gt;&lt;rect x='468' y='96' width='368' height='4' rx='2' fill='#1F5FA8' /&gt;&lt;text x='486' y='130' fontSize='15.5' fontWeight='bold' fill='#1F5FA8' textAnchor='start' fontFamily='Microsoft YaHei'&gt;错误 2：方法定义时忘了第一个参数 self&lt;/text&gt;&lt;text x='486' y='169.0' fontSize='13' fill='#3A4A58' textAnchor='start' fontFamily='Microsoft YaHei'&gt;· class Rectangle:&lt;/text&gt;&lt;rect x='872' y='96' width='368' height='330' rx='12' fill='#FFFFFF' stroke='#D8E3EE' /&gt;&lt;rect x='872' y='96' width='368' height='4' rx='2' fill='#1F5FA8' /&gt;&lt;text x='890' y='130' fontSize='15.5' fontWeight='bold' fill='#1F5FA8' textAnchor='start' fontFamily='Microsoft YaHei'&gt;错误 3：忘记冒号或缩进（和函数一样，&lt;/text&gt;&lt;text x='890' y='153' fontSize='15.5' fontWeight='bold' fill='#1F5FA8' textAnchor='start' fontFamily='Microsoft YaHei'&gt;但更隐蔽）&lt;/text&gt;&lt;text x='890' y='192.0' fontSize='13' fill='#3A4A58' textAnchor='start' fontFamily='Microsoft YaHei'&gt;· class Dog:&lt;/text&gt;&lt;rect x='64' y='574' width='1152' height='66' rx='12' fill='#EEF5FB' /&gt;&lt;text x='84' y='616' fontSize='14' fill='#243444' textAnchor='start' fontFamily='Microsoft YaHei'&gt;看不懂的地方先回讲义对应小节读一遍，再回来对着这页复述一次——能讲出来才算真懂。&lt;/text&gt;&#13;&#10;            &lt;text x='64' y='684' fontSize='13' fill='#8A9AAA' fontFamily='Microsoft YaHei'&gt;Python 讲授课件 · 逐节版&lt;/text&gt;&#13;&#10;            &lt;text x='1216' y='684' fontSize='13' fill='#8A9AAA' textAnchor='end' fontFamily='Microsoft YaHei'&gt;单元 8 · 第 45 节&lt;/text&gt;&#13;&#10;        &lt;/svg&gt;&#13;&#10;    &lt;/Box&gt;&#13;&#10;&lt;/Slide&gt;&#13;&#10;"/>
+        <p:cNvPr id="28" name="" descr="&lt;Slide style={{ width: '1280px', height: '720px', backgroundColor: '#FAFCFE', padding: 0, position: 'relative', overflow: 'hidden' }}&gt;&#13;&#10;    &lt;Box style={{ position: 'absolute', left: 64, top: 36, width: '1152px', flexDirection: 'row', alignItems: 'center', gap: 12 }}&gt;&#13;&#10;        &lt;Box style={{ background: '#0E9B78', borderRadius: 5, padding: '3px 11px' }}&gt;&#13;&#10;            &lt;Text style={{ fontSize: 14, fontWeight: 'bold', color: '#FFFFFF' }}&gt;第 45 节&lt;/Text&gt;&#13;&#10;        &lt;/Box&gt;&#13;&#10;        &lt;Text style={{ fontSize: 30, fontWeight: 'bold', color: '#16232E' }}&gt;核心知识点&lt;/Text&gt;&#13;&#10;        &lt;Text style={{ fontSize: 15, color: '#5A6B7A', marginTop: 10 }}&gt;· ★ 六个常见错误逐条自查&lt;/Text&gt;&#13;&#10;    &lt;/Box&gt;&#13;&#10;    &lt;Box style={{ position: 'absolute', left: 0, top: 0, width: '1280px', height: '720px' }}&gt;&#13;&#10;        &lt;svg width='1280' height='720' viewBox='0 0 1280 720'&gt;&#13;&#10;            &lt;rect x='64' y='96' width='368' height='330' rx='12' fill='#FFFFFF' stroke='#D8E3EE' /&gt;&lt;rect x='64' y='96' width='368' height='4' rx='2' fill='#1F5FA8' /&gt;&lt;text x='82' y='130' fontSize='15.5' fontWeight='bold' fill='#1F5FA8' textAnchor='start' fontFamily='Microsoft YaHei'&gt;错误 1：★ 方法忘记写 self&lt;/text&gt;&lt;text x='82' y='169.0' fontSize='13' fill='#3A4A58' textAnchor='start' fontFamily='Microsoft YaHei'&gt;· NameError: name 'count' is not&lt;/text&gt;&lt;text x='82' y='188.5' fontSize='13' fill='#3A4A58' textAnchor='start' fontFamily='Microsoft YaHei'&gt;defined（左边忘了写）&lt;/text&gt;&lt;text x='82' y='217.0' fontSize='13' fill='#3A4A58' textAnchor='start' fontFamily='Microsoft YaHei'&gt;· 属性值永远不变 / 方法结束后&quot;数据丢了&quot;&lt;/text&gt;&lt;text x='82' y='245.5' fontSize='13' fill='#3A4A58' textAnchor='start' fontFamily='Microsoft YaHei'&gt;· 属性变成 None 或 0&lt;/text&gt;&lt;rect x='468' y='96' width='368' height='330' rx='12' fill='#FFFFFF' stroke='#D8E3EE' /&gt;&lt;rect x='468' y='96' width='368' height='4' rx='2' fill='#1F5FA8' /&gt;&lt;text x='486' y='130' fontSize='15.5' fontWeight='bold' fill='#1F5FA8' textAnchor='start' fontFamily='Microsoft YaHei'&gt;错误 2：方法定义时忘了第一个参数 self&lt;/text&gt;&lt;text x='486' y='169.0' fontSize='13' fill='#3A4A58' textAnchor='start' fontFamily='Microsoft YaHei'&gt;· TypeError: area() takes 0 positional&lt;/text&gt;&lt;text x='486' y='188.5' fontSize='13' fill='#3A4A58' textAnchor='start' fontFamily='Microsoft YaHei'&gt;arguments but…&lt;/text&gt;&lt;text x='486' y='217.0' fontSize='13' fill='#3A4A58' textAnchor='start' fontFamily='Microsoft YaHei'&gt;· 定义时少写了 self，但调用时 Python&lt;/text&gt;&lt;text x='486' y='236.5' fontSize='13' fill='#3A4A58' textAnchor='start' fontFamily='Microsoft YaHei'&gt;会自动传入对象，结果参数数量对不上。&lt;/text&gt;&lt;text x='486' y='265.0' fontSize='13' fill='#3A4A58' textAnchor='start' fontFamily='Microsoft YaHei'&gt;· 每个方法（除了 __init__、__str__&lt;/text&gt;&lt;text x='486' y='284.5' fontSize='13' fill='#3A4A58' textAnchor='start' fontFamily='Microsoft YaHei'&gt;等双下划线方法）定义时，第一个参数必须是 self。&lt;/text&gt;&lt;rect x='872' y='96' width='368' height='330' rx='12' fill='#FFFFFF' stroke='#D8E3EE' /&gt;&lt;rect x='872' y='96' width='368' height='4' rx='2' fill='#1F5FA8' /&gt;&lt;text x='890' y='130' fontSize='15.5' fontWeight='bold' fill='#1F5FA8' textAnchor='start' fontFamily='Microsoft YaHei'&gt;错误 3：忘记冒号或缩进（和函数一样，&lt;/text&gt;&lt;text x='890' y='153' fontSize='15.5' fontWeight='bold' fill='#1F5FA8' textAnchor='start' fontFamily='Microsoft YaHei'&gt;但更隐蔽）&lt;/text&gt;&lt;text x='890' y='192.0' fontSize='13' fill='#3A4A58' textAnchor='start' fontFamily='Microsoft YaHei'&gt;· SyntaxError: expected ':' /&lt;/text&gt;&lt;text x='890' y='211.5' fontSize='13' fill='#3A4A58' textAnchor='start' fontFamily='Microsoft YaHei'&gt;IndentationError…&lt;/text&gt;&lt;text x='890' y='240.0' fontSize='13' fill='#3A4A58' textAnchor='start' fontFamily='Microsoft YaHei'&gt;· def 行末必须有 :；class&lt;/text&gt;&lt;text x='890' y='259.5' fontSize='13' fill='#3A4A58' textAnchor='start' fontFamily='Microsoft YaHei'&gt;体内所有代码（包括方法）必须有缩进。&lt;/text&gt;&lt;rect x='64' y='574' width='1152' height='66' rx='12' fill='#EEF5FB' /&gt;&lt;text x='84' y='616' fontSize='14' fill='#243444' textAnchor='start' fontFamily='Microsoft YaHei'&gt;看不懂的地方先回讲义对应小节读一遍，再回来对着这页复述一次——能讲出来才算真懂。&lt;/text&gt;&#13;&#10;            &lt;text x='64' y='684' fontSize='13' fill='#8A9AAA' fontFamily='Microsoft YaHei'&gt;Python 讲授课件 · 逐节版&lt;/text&gt;&#13;&#10;            &lt;text x='1216' y='684' fontSize='13' fill='#8A9AAA' textAnchor='end' fontFamily='Microsoft YaHei'&gt;单元 8 · 第 45 节&lt;/text&gt;&#13;&#10;        &lt;/svg&gt;&#13;&#10;    &lt;/Box&gt;&#13;&#10;&lt;/Slide&gt;&#13;&#10;"/>
         <p:cNvGrpSpPr/>
         <p:nvPr/>
       </p:nvGrpSpPr>
@@ -3477,7 +3477,7 @@
   <p:cSld>
     <p:spTree>
       <p:nvGrpSpPr>
-        <p:cNvPr id="81" name="" descr="&lt;Slide style={{ width: '1280px', height: '720px', backgroundColor: '#FAFCFE', padding: 0, position: 'relative', overflow: 'hidden' }}&gt;&#13;&#10;    &lt;Box style={{ position: 'absolute', left: 64, top: 36, width: '1152px', flexDirection: 'row', alignItems: 'center', gap: 12 }}&gt;&#13;&#10;        &lt;Box style={{ background: '#0E9B78', borderRadius: 5, padding: '3px 11px' }}&gt;&#13;&#10;            &lt;Text style={{ fontSize: 14, fontWeight: 'bold', color: '#FFFFFF' }}&gt;第 41 节&lt;/Text&gt;&#13;&#10;        &lt;/Box&gt;&#13;&#10;        &lt;Text style={{ fontSize: 30, fontWeight: 'bold', color: '#16232E' }}&gt;核心知识点&lt;/Text&gt;&#13;&#10;        &lt;Text style={{ fontSize: 15, color: '#5A6B7A', marginTop: 10 }}&gt;· __init__、属性方法与 __str__&lt;/Text&gt;&#13;&#10;    &lt;/Box&gt;&#13;&#10;    &lt;Box style={{ position: 'absolute', left: 0, top: 0, width: '1280px', height: '720px' }}&gt;&#13;&#10;        &lt;svg width='1280' height='720' viewBox='0 0 1280 720'&gt;&#13;&#10;            &lt;rect x='64' y='96' width='368' height='330' rx='12' fill='#FFFFFF' stroke='#D8E3EE' /&gt;&lt;rect x='64' y='96' width='368' height='4' rx='2' fill='#1F5FA8' /&gt;&lt;text x='82' y='130' fontSize='15.5' fontWeight='bold' fill='#1F5FA8' textAnchor='start' fontFamily='Microsoft YaHei'&gt;2.3 __init__：对象的出生证明&lt;/text&gt;&lt;text x='82' y='169.0' fontSize='13' fill='#3A4A58' textAnchor='start' fontFamily='Microsoft YaHei'&gt;· 实例属性 vs 类属性&lt;/text&gt;&lt;rect x='468' y='96' width='368' height='330' rx='12' fill='#FFFFFF' stroke='#D8E3EE' /&gt;&lt;rect x='468' y='96' width='368' height='4' rx='2' fill='#1F5FA8' /&gt;&lt;text x='486' y='130' fontSize='15.5' fontWeight='bold' fill='#1F5FA8' textAnchor='start' fontFamily='Microsoft YaHei'&gt;2.4 属性 vs 方法&lt;/text&gt;&lt;text x='486' y='169.0' fontSize='13' fill='#3A4A58' textAnchor='start' fontFamily='Microsoft YaHei'&gt;· class Car:&lt;/text&gt;&lt;rect x='872' y='96' width='368' height='330' rx='12' fill='#FFFFFF' stroke='#D8E3EE' /&gt;&lt;rect x='872' y='96' width='368' height='4' rx='2' fill='#1F5FA8' /&gt;&lt;text x='890' y='130' fontSize='15.5' fontWeight='bold' fill='#1F5FA8' textAnchor='start' fontFamily='Microsoft YaHei'&gt;2.5 __str__：让对象能被读懂地打印&lt;/text&gt;&lt;text x='890' y='169.0' fontSize='13' fill='#3A4A58' textAnchor='start' fontFamily='Microsoft YaHei'&gt;· 默认情况下打印对象会得到一段谁也看不懂的东西：&lt;/text&gt;&lt;rect x='64' y='574' width='1152' height='66' rx='12' fill='#EEF5FB' /&gt;&lt;text x='84' y='616' fontSize='14' fill='#243444' textAnchor='start' fontFamily='Microsoft YaHei'&gt;看不懂的地方先回讲义对应小节读一遍，再回来对着这页复述一次——能讲出来才算真懂。&lt;/text&gt;&#13;&#10;            &lt;text x='64' y='684' fontSize='13' fill='#8A9AAA' fontFamily='Microsoft YaHei'&gt;Python 讲授课件 · 逐节版&lt;/text&gt;&#13;&#10;            &lt;text x='1216' y='684' fontSize='13' fill='#8A9AAA' textAnchor='end' fontFamily='Microsoft YaHei'&gt;单元 8 · 第 41 节&lt;/text&gt;&#13;&#10;        &lt;/svg&gt;&#13;&#10;    &lt;/Box&gt;&#13;&#10;&lt;/Slide&gt;&#13;&#10;"/>
+        <p:cNvPr id="81" name="" descr="&lt;Slide style={{ width: '1280px', height: '720px', backgroundColor: '#FAFCFE', padding: 0, position: 'relative', overflow: 'hidden' }}&gt;&#13;&#10;    &lt;Box style={{ position: 'absolute', left: 64, top: 36, width: '1152px', flexDirection: 'row', alignItems: 'center', gap: 12 }}&gt;&#13;&#10;        &lt;Box style={{ background: '#0E9B78', borderRadius: 5, padding: '3px 11px' }}&gt;&#13;&#10;            &lt;Text style={{ fontSize: 14, fontWeight: 'bold', color: '#FFFFFF' }}&gt;第 41 节&lt;/Text&gt;&#13;&#10;        &lt;/Box&gt;&#13;&#10;        &lt;Text style={{ fontSize: 30, fontWeight: 'bold', color: '#16232E' }}&gt;核心知识点&lt;/Text&gt;&#13;&#10;        &lt;Text style={{ fontSize: 15, color: '#5A6B7A', marginTop: 10 }}&gt;· __init__、属性方法与 __str__&lt;/Text&gt;&#13;&#10;    &lt;/Box&gt;&#13;&#10;    &lt;Box style={{ position: 'absolute', left: 0, top: 0, width: '1280px', height: '720px' }}&gt;&#13;&#10;        &lt;svg width='1280' height='720' viewBox='0 0 1280 720'&gt;&#13;&#10;            &lt;rect x='64' y='96' width='548' height='330' rx='12' fill='#FFFFFF' stroke='#D8E3EE' /&gt;&lt;rect x='64' y='96' width='548' height='4' rx='2' fill='#1F5FA8' /&gt;&lt;text x='82' y='130' fontSize='15.5' fontWeight='bold' fill='#1F5FA8' textAnchor='start' fontFamily='Microsoft YaHei'&gt;2.3 __init__：对象的出生证明&lt;/text&gt;&lt;text x='82' y='169.0' fontSize='13' fill='#3A4A58' textAnchor='start' fontFamily='Microsoft YaHei'&gt;· 实例属性 vs 类属性&lt;/text&gt;&lt;rect x='668' y='96' width='548' height='330' rx='12' fill='#FFFFFF' stroke='#D8E3EE' /&gt;&lt;rect x='668' y='96' width='548' height='4' rx='2' fill='#1F5FA8' /&gt;&lt;text x='686' y='130' fontSize='15.5' fontWeight='bold' fill='#1F5FA8' textAnchor='start' fontFamily='Microsoft YaHei'&gt;2.5 __str__：让对象能被读懂地打印&lt;/text&gt;&lt;text x='686' y='169.0' fontSize='13' fill='#3A4A58' textAnchor='start' fontFamily='Microsoft YaHei'&gt;· __str__ 就是给这个类准备一份&quot;自我介绍模板&quot;。&lt;/text&gt;&lt;rect x='64' y='574' width='1152' height='66' rx='12' fill='#EEF5FB' /&gt;&lt;text x='84' y='616' fontSize='14' fill='#243444' textAnchor='start' fontFamily='Microsoft YaHei'&gt;看不懂的地方先回讲义对应小节读一遍，再回来对着这页复述一次——能讲出来才算真懂。&lt;/text&gt;&#13;&#10;            &lt;text x='64' y='684' fontSize='13' fill='#8A9AAA' fontFamily='Microsoft YaHei'&gt;Python 讲授课件 · 逐节版&lt;/text&gt;&#13;&#10;            &lt;text x='1216' y='684' fontSize='13' fill='#8A9AAA' textAnchor='end' fontFamily='Microsoft YaHei'&gt;单元 8 · 第 41 节&lt;/text&gt;&#13;&#10;        &lt;/svg&gt;&#13;&#10;    &lt;/Box&gt;&#13;&#10;&lt;/Slide&gt;&#13;&#10;"/>
         <p:cNvGrpSpPr/>
         <p:nvPr/>
       </p:nvGrpSpPr>

--- a/python-course-ppt/逐节课件/Python讲授课件-单元08.pptx
+++ b/python-course-ppt/逐节课件/Python讲授课件-单元08.pptx
@@ -240,6 +240,1710 @@
     </a:lvl9pPr>
   </p:notesStyle>
 </p:notesMaster>
+</file>
+
+<file path=ppt/notesSlides/notesSlide1.xml><?xml version="1.0" encoding="utf-8"?>
+<p:notes xmlns:a="http://schemas.openxmlformats.org/drawingml/2006/main" xmlns:p="http://schemas.openxmlformats.org/presentationml/2006/main" xmlns:r="http://schemas.openxmlformats.org/officeDocument/2006/relationships">
+  <p:cSld>
+    <p:spTree>
+      <p:nvGrpSpPr>
+        <p:cNvPr id="1" name=""/>
+        <p:cNvGrpSpPr/>
+        <p:nvPr/>
+      </p:nvGrpSpPr>
+      <p:grpSpPr>
+        <a:xfrm>
+          <a:off x="0" y="0"/>
+          <a:ext cx="0" cy="0"/>
+          <a:chOff x="0" y="0"/>
+          <a:chExt cx="0" cy="0"/>
+        </a:xfrm>
+      </p:grpSpPr>
+      <p:sp>
+        <p:nvSpPr>
+          <p:cNvPr id="2" name="讲课提示"/>
+          <p:cNvSpPr txBox="1"/>
+          <p:nvPr/>
+        </p:nvSpPr>
+        <p:spPr>
+          <a:xfrm>
+            <a:off x="457200" y="457200"/>
+            <a:ext cx="6858000" cy="4800600"/>
+          </a:xfrm>
+          <a:prstGeom prst="rect">
+            <a:avLst/>
+          </a:prstGeom>
+        </p:spPr>
+        <p:txBody>
+          <a:bodyPr wrap="square"/>
+          <a:lstStyle/>
+          <a:p>
+            <a:r>
+              <a:rPr lang="zh-CN" dirty="0"/>
+              <a:t>单元 8 · 单元 8 · 类</a:t>
+            </a:r>
+          </a:p>
+          <a:p>
+            <a:r>
+              <a:rPr lang="zh-CN" dirty="0"/>
+              <a:t/>
+            </a:r>
+          </a:p>
+          <a:p>
+            <a:r>
+              <a:rPr lang="zh-CN" dirty="0"/>
+              <a:t>本单元包含以下课节：</a:t>
+            </a:r>
+          </a:p>
+          <a:p>
+            <a:r>
+              <a:rPr lang="zh-CN" dirty="0"/>
+              <a:t>· 第 40 节 类、实例与 self</a:t>
+            </a:r>
+          </a:p>
+          <a:p>
+            <a:r>
+              <a:rPr lang="zh-CN" dirty="0"/>
+              <a:t>· 第 41 节 __init__、属性方法与 __str__</a:t>
+            </a:r>
+          </a:p>
+          <a:p>
+            <a:r>
+              <a:rPr lang="zh-CN" dirty="0"/>
+              <a:t>· 第 42 节 继承与方法重写</a:t>
+            </a:r>
+          </a:p>
+          <a:p>
+            <a:r>
+              <a:rPr lang="zh-CN" dirty="0"/>
+              <a:t>· 第 43 节 类的组合与示例串讲</a:t>
+            </a:r>
+          </a:p>
+          <a:p>
+            <a:r>
+              <a:rPr lang="zh-CN" dirty="0"/>
+              <a:t>· 第 44 节 动手实战与答案讲评</a:t>
+            </a:r>
+          </a:p>
+          <a:p>
+            <a:r>
+              <a:rPr lang="zh-CN" dirty="0"/>
+              <a:t>· 第 45 节 ★ 六个常见错误逐条自查</a:t>
+            </a:r>
+          </a:p>
+          <a:p>
+            <a:r>
+              <a:rPr lang="zh-CN" dirty="0"/>
+              <a:t>· 第 46 节 单元 8 验收复盘</a:t>
+            </a:r>
+          </a:p>
+          <a:p>
+            <a:r>
+              <a:rPr lang="zh-CN" dirty="0"/>
+              <a:t/>
+            </a:r>
+          </a:p>
+          <a:p>
+            <a:r>
+              <a:rPr lang="zh-CN" dirty="0"/>
+              <a:t>开场用 3 分钟讲清：这个单元学完能做出什么，最后会被关卡怎么验。</a:t>
+            </a:r>
+          </a:p>
+        </p:txBody>
+      </p:sp>
+    </p:spTree>
+  </p:cSld>
+  <p:clrMapOvr>
+    <a:masterClrMapping/>
+  </p:clrMapOvr>
+</p:notes>
+</file>
+
+<file path=ppt/notesSlides/notesSlide10.xml><?xml version="1.0" encoding="utf-8"?>
+<p:notes xmlns:a="http://schemas.openxmlformats.org/drawingml/2006/main" xmlns:p="http://schemas.openxmlformats.org/presentationml/2006/main" xmlns:r="http://schemas.openxmlformats.org/officeDocument/2006/relationships">
+  <p:cSld>
+    <p:spTree>
+      <p:nvGrpSpPr>
+        <p:cNvPr id="1" name=""/>
+        <p:cNvGrpSpPr/>
+        <p:nvPr/>
+      </p:nvGrpSpPr>
+      <p:grpSpPr>
+        <a:xfrm>
+          <a:off x="0" y="0"/>
+          <a:ext cx="0" cy="0"/>
+          <a:chOff x="0" y="0"/>
+          <a:chExt cx="0" cy="0"/>
+        </a:xfrm>
+      </p:grpSpPr>
+      <p:sp>
+        <p:nvSpPr>
+          <p:cNvPr id="2" name="讲课提示"/>
+          <p:cNvSpPr txBox="1"/>
+          <p:nvPr/>
+        </p:nvSpPr>
+        <p:spPr>
+          <a:xfrm>
+            <a:off x="457200" y="457200"/>
+            <a:ext cx="6858000" cy="4800600"/>
+          </a:xfrm>
+          <a:prstGeom prst="rect">
+            <a:avLst/>
+          </a:prstGeom>
+        </p:spPr>
+        <p:txBody>
+          <a:bodyPr wrap="square"/>
+          <a:lstStyle/>
+          <a:p>
+            <a:r>
+              <a:rPr lang="zh-CN" dirty="0"/>
+              <a:t>第 44 节 · 动手实战与答案讲评</a:t>
+            </a:r>
+          </a:p>
+          <a:p>
+            <a:r>
+              <a:rPr lang="zh-CN" dirty="0"/>
+              <a:t>单元 8 · 类 · W10</a:t>
+            </a:r>
+          </a:p>
+          <a:p>
+            <a:r>
+              <a:rPr lang="zh-CN" dirty="0"/>
+              <a:t/>
+            </a:r>
+          </a:p>
+          <a:p>
+            <a:r>
+              <a:rPr lang="zh-CN" dirty="0"/>
+              <a:t>学习目标：独立完成单元 8 练习，能自己设计一个类</a:t>
+            </a:r>
+          </a:p>
+          <a:p>
+            <a:r>
+              <a:rPr lang="zh-CN" dirty="0"/>
+              <a:t/>
+            </a:r>
+          </a:p>
+          <a:p>
+            <a:r>
+              <a:rPr lang="zh-CN" dirty="0"/>
+              <a:t>课堂实操（40 分钟，不看答案）：</a:t>
+            </a:r>
+          </a:p>
+          <a:p>
+            <a:r>
+              <a:rPr lang="zh-CN" dirty="0"/>
+              <a:t>· ★ 现场自建 3 个类：学生记录 / 购物车 / 银行账户</a:t>
+            </a:r>
+          </a:p>
+          <a:p>
+            <a:r>
+              <a:rPr lang="zh-CN" dirty="0"/>
+              <a:t>· 限时 30 分钟独立完成基础档</a:t>
+            </a:r>
+          </a:p>
+          <a:p>
+            <a:r>
+              <a:rPr lang="zh-CN" dirty="0"/>
+              <a:t/>
+            </a:r>
+          </a:p>
+          <a:p>
+            <a:r>
+              <a:rPr lang="zh-CN" dirty="0"/>
+              <a:t>课后作业：</a:t>
+            </a:r>
+          </a:p>
+          <a:p>
+            <a:r>
+              <a:rPr lang="zh-CN" dirty="0"/>
+              <a:t>· 完成题库 L4 全部 + 单元 8 进阶档</a:t>
+            </a:r>
+          </a:p>
+          <a:p>
+            <a:r>
+              <a:rPr lang="zh-CN" dirty="0"/>
+              <a:t>· 产出：3 个自建类（含继承）</a:t>
+            </a:r>
+          </a:p>
+          <a:p>
+            <a:r>
+              <a:rPr lang="zh-CN" dirty="0"/>
+              <a:t/>
+            </a:r>
+          </a:p>
+          <a:p>
+            <a:r>
+              <a:rPr lang="zh-CN" dirty="0"/>
+              <a:t>节奏：讲 20 分钟 → 学员自己敲 40 分钟（不看答案）→ 对讲评自查 20 分钟 → 写作业 10 分钟。</a:t>
+            </a:r>
+          </a:p>
+        </p:txBody>
+      </p:sp>
+    </p:spTree>
+  </p:cSld>
+  <p:clrMapOvr>
+    <a:masterClrMapping/>
+  </p:clrMapOvr>
+</p:notes>
+</file>
+
+<file path=ppt/notesSlides/notesSlide11.xml><?xml version="1.0" encoding="utf-8"?>
+<p:notes xmlns:a="http://schemas.openxmlformats.org/drawingml/2006/main" xmlns:p="http://schemas.openxmlformats.org/presentationml/2006/main" xmlns:r="http://schemas.openxmlformats.org/officeDocument/2006/relationships">
+  <p:cSld>
+    <p:spTree>
+      <p:nvGrpSpPr>
+        <p:cNvPr id="1" name=""/>
+        <p:cNvGrpSpPr/>
+        <p:nvPr/>
+      </p:nvGrpSpPr>
+      <p:grpSpPr>
+        <a:xfrm>
+          <a:off x="0" y="0"/>
+          <a:ext cx="0" cy="0"/>
+          <a:chOff x="0" y="0"/>
+          <a:chExt cx="0" cy="0"/>
+        </a:xfrm>
+      </p:grpSpPr>
+      <p:sp>
+        <p:nvSpPr>
+          <p:cNvPr id="2" name="讲课提示"/>
+          <p:cNvSpPr txBox="1"/>
+          <p:nvPr/>
+        </p:nvSpPr>
+        <p:spPr>
+          <a:xfrm>
+            <a:off x="457200" y="457200"/>
+            <a:ext cx="6858000" cy="4800600"/>
+          </a:xfrm>
+          <a:prstGeom prst="rect">
+            <a:avLst/>
+          </a:prstGeom>
+        </p:spPr>
+        <p:txBody>
+          <a:bodyPr wrap="square"/>
+          <a:lstStyle/>
+          <a:p>
+            <a:r>
+              <a:rPr lang="zh-CN" dirty="0"/>
+              <a:t>第 44 节 · 核心知识点：动手实战与答案讲评</a:t>
+            </a:r>
+          </a:p>
+          <a:p>
+            <a:r>
+              <a:rPr lang="zh-CN" dirty="0"/>
+              <a:t/>
+            </a:r>
+          </a:p>
+          <a:p>
+            <a:r>
+              <a:rPr lang="zh-CN" dirty="0"/>
+              <a:t>讲这一页时：先让学生说出上节课的结论，再逐块讲要点。</a:t>
+            </a:r>
+          </a:p>
+          <a:p>
+            <a:r>
+              <a:rPr lang="zh-CN" dirty="0"/>
+              <a:t>每讲完一块，问一句「这一步如果写错了，报错会长什么样？」——把错误提前讲。</a:t>
+            </a:r>
+          </a:p>
+          <a:p>
+            <a:r>
+              <a:rPr lang="zh-CN" dirty="0"/>
+              <a:t/>
+            </a:r>
+          </a:p>
+          <a:p>
+            <a:r>
+              <a:rPr lang="zh-CN" dirty="0"/>
+              <a:t>本节目标：独立完成单元 8 练习，能自己设计一个类</a:t>
+            </a:r>
+          </a:p>
+          <a:p>
+            <a:r>
+              <a:rPr lang="zh-CN" dirty="0"/>
+              <a:t/>
+            </a:r>
+          </a:p>
+          <a:p>
+            <a:r>
+              <a:rPr lang="zh-CN" dirty="0"/>
+              <a:t>看不到懂的地方，回讲义对应小节读一遍，再回来对着这页复述一次——能讲出来才算真懂。</a:t>
+            </a:r>
+          </a:p>
+        </p:txBody>
+      </p:sp>
+    </p:spTree>
+  </p:cSld>
+  <p:clrMapOvr>
+    <a:masterClrMapping/>
+  </p:clrMapOvr>
+</p:notes>
+</file>
+
+<file path=ppt/notesSlides/notesSlide12.xml><?xml version="1.0" encoding="utf-8"?>
+<p:notes xmlns:a="http://schemas.openxmlformats.org/drawingml/2006/main" xmlns:p="http://schemas.openxmlformats.org/presentationml/2006/main" xmlns:r="http://schemas.openxmlformats.org/officeDocument/2006/relationships">
+  <p:cSld>
+    <p:spTree>
+      <p:nvGrpSpPr>
+        <p:cNvPr id="1" name=""/>
+        <p:cNvGrpSpPr/>
+        <p:nvPr/>
+      </p:nvGrpSpPr>
+      <p:grpSpPr>
+        <a:xfrm>
+          <a:off x="0" y="0"/>
+          <a:ext cx="0" cy="0"/>
+          <a:chOff x="0" y="0"/>
+          <a:chExt cx="0" cy="0"/>
+        </a:xfrm>
+      </p:grpSpPr>
+      <p:sp>
+        <p:nvSpPr>
+          <p:cNvPr id="2" name="讲课提示"/>
+          <p:cNvSpPr txBox="1"/>
+          <p:nvPr/>
+        </p:nvSpPr>
+        <p:spPr>
+          <a:xfrm>
+            <a:off x="457200" y="457200"/>
+            <a:ext cx="6858000" cy="4800600"/>
+          </a:xfrm>
+          <a:prstGeom prst="rect">
+            <a:avLst/>
+          </a:prstGeom>
+        </p:spPr>
+        <p:txBody>
+          <a:bodyPr wrap="square"/>
+          <a:lstStyle/>
+          <a:p>
+            <a:r>
+              <a:rPr lang="zh-CN" dirty="0"/>
+              <a:t>第 45 节 · ★ 六个常见错误逐条自查</a:t>
+            </a:r>
+          </a:p>
+          <a:p>
+            <a:r>
+              <a:rPr lang="zh-CN" dirty="0"/>
+              <a:t>单元 8 · 类 · W10</a:t>
+            </a:r>
+          </a:p>
+          <a:p>
+            <a:r>
+              <a:rPr lang="zh-CN" dirty="0"/>
+              <a:t/>
+            </a:r>
+          </a:p>
+          <a:p>
+            <a:r>
+              <a:rPr lang="zh-CN" dirty="0"/>
+              <a:t>学习目标：能对照错误清单逐条自查，把类相关的坑全部避开</a:t>
+            </a:r>
+          </a:p>
+          <a:p>
+            <a:r>
+              <a:rPr lang="zh-CN" dirty="0"/>
+              <a:t/>
+            </a:r>
+          </a:p>
+          <a:p>
+            <a:r>
+              <a:rPr lang="zh-CN" dirty="0"/>
+              <a:t>课堂实操（40 分钟，不看答案）：</a:t>
+            </a:r>
+          </a:p>
+          <a:p>
+            <a:r>
+              <a:rPr lang="zh-CN" dirty="0"/>
+              <a:t>· 逐条现场制造并修复 6 个错误</a:t>
+            </a:r>
+          </a:p>
+          <a:p>
+            <a:r>
+              <a:rPr lang="zh-CN" dirty="0"/>
+              <a:t>· 重点讲透「方法忘记写 self」</a:t>
+            </a:r>
+          </a:p>
+          <a:p>
+            <a:r>
+              <a:rPr lang="zh-CN" dirty="0"/>
+              <a:t/>
+            </a:r>
+          </a:p>
+          <a:p>
+            <a:r>
+              <a:rPr lang="zh-CN" dirty="0"/>
+              <a:t>课后作业：</a:t>
+            </a:r>
+          </a:p>
+          <a:p>
+            <a:r>
+              <a:rPr lang="zh-CN" dirty="0"/>
+              <a:t>· 把 6 个错误各写一个最小复现</a:t>
+            </a:r>
+          </a:p>
+          <a:p>
+            <a:r>
+              <a:rPr lang="zh-CN" dirty="0"/>
+              <a:t/>
+            </a:r>
+          </a:p>
+          <a:p>
+            <a:r>
+              <a:rPr lang="zh-CN" dirty="0"/>
+              <a:t>节奏：讲 20 分钟 → 学员自己敲 40 分钟（不看答案）→ 对讲评自查 20 分钟 → 写作业 10 分钟。</a:t>
+            </a:r>
+          </a:p>
+        </p:txBody>
+      </p:sp>
+    </p:spTree>
+  </p:cSld>
+  <p:clrMapOvr>
+    <a:masterClrMapping/>
+  </p:clrMapOvr>
+</p:notes>
+</file>
+
+<file path=ppt/notesSlides/notesSlide13.xml><?xml version="1.0" encoding="utf-8"?>
+<p:notes xmlns:a="http://schemas.openxmlformats.org/drawingml/2006/main" xmlns:p="http://schemas.openxmlformats.org/presentationml/2006/main" xmlns:r="http://schemas.openxmlformats.org/officeDocument/2006/relationships">
+  <p:cSld>
+    <p:spTree>
+      <p:nvGrpSpPr>
+        <p:cNvPr id="1" name=""/>
+        <p:cNvGrpSpPr/>
+        <p:nvPr/>
+      </p:nvGrpSpPr>
+      <p:grpSpPr>
+        <a:xfrm>
+          <a:off x="0" y="0"/>
+          <a:ext cx="0" cy="0"/>
+          <a:chOff x="0" y="0"/>
+          <a:chExt cx="0" cy="0"/>
+        </a:xfrm>
+      </p:grpSpPr>
+      <p:sp>
+        <p:nvSpPr>
+          <p:cNvPr id="2" name="讲课提示"/>
+          <p:cNvSpPr txBox="1"/>
+          <p:nvPr/>
+        </p:nvSpPr>
+        <p:spPr>
+          <a:xfrm>
+            <a:off x="457200" y="457200"/>
+            <a:ext cx="6858000" cy="4800600"/>
+          </a:xfrm>
+          <a:prstGeom prst="rect">
+            <a:avLst/>
+          </a:prstGeom>
+        </p:spPr>
+        <p:txBody>
+          <a:bodyPr wrap="square"/>
+          <a:lstStyle/>
+          <a:p>
+            <a:r>
+              <a:rPr lang="zh-CN" dirty="0"/>
+              <a:t>第 45 节 · 核心知识点：★ 六个常见错误逐条自查</a:t>
+            </a:r>
+          </a:p>
+          <a:p>
+            <a:r>
+              <a:rPr lang="zh-CN" dirty="0"/>
+              <a:t/>
+            </a:r>
+          </a:p>
+          <a:p>
+            <a:r>
+              <a:rPr lang="zh-CN" dirty="0"/>
+              <a:t>讲这一页时：先让学生说出上节课的结论，再逐块讲要点。</a:t>
+            </a:r>
+          </a:p>
+          <a:p>
+            <a:r>
+              <a:rPr lang="zh-CN" dirty="0"/>
+              <a:t>每讲完一块，问一句「这一步如果写错了，报错会长什么样？」——把错误提前讲。</a:t>
+            </a:r>
+          </a:p>
+          <a:p>
+            <a:r>
+              <a:rPr lang="zh-CN" dirty="0"/>
+              <a:t/>
+            </a:r>
+          </a:p>
+          <a:p>
+            <a:r>
+              <a:rPr lang="zh-CN" dirty="0"/>
+              <a:t>本节目标：能对照错误清单逐条自查，把类相关的坑全部避开</a:t>
+            </a:r>
+          </a:p>
+          <a:p>
+            <a:r>
+              <a:rPr lang="zh-CN" dirty="0"/>
+              <a:t/>
+            </a:r>
+          </a:p>
+          <a:p>
+            <a:r>
+              <a:rPr lang="zh-CN" dirty="0"/>
+              <a:t>看不到懂的地方，回讲义对应小节读一遍，再回来对着这页复述一次——能讲出来才算真懂。</a:t>
+            </a:r>
+          </a:p>
+        </p:txBody>
+      </p:sp>
+    </p:spTree>
+  </p:cSld>
+  <p:clrMapOvr>
+    <a:masterClrMapping/>
+  </p:clrMapOvr>
+</p:notes>
+</file>
+
+<file path=ppt/notesSlides/notesSlide14.xml><?xml version="1.0" encoding="utf-8"?>
+<p:notes xmlns:a="http://schemas.openxmlformats.org/drawingml/2006/main" xmlns:p="http://schemas.openxmlformats.org/presentationml/2006/main" xmlns:r="http://schemas.openxmlformats.org/officeDocument/2006/relationships">
+  <p:cSld>
+    <p:spTree>
+      <p:nvGrpSpPr>
+        <p:cNvPr id="1" name=""/>
+        <p:cNvGrpSpPr/>
+        <p:nvPr/>
+      </p:nvGrpSpPr>
+      <p:grpSpPr>
+        <a:xfrm>
+          <a:off x="0" y="0"/>
+          <a:ext cx="0" cy="0"/>
+          <a:chOff x="0" y="0"/>
+          <a:chExt cx="0" cy="0"/>
+        </a:xfrm>
+      </p:grpSpPr>
+      <p:sp>
+        <p:nvSpPr>
+          <p:cNvPr id="2" name="讲课提示"/>
+          <p:cNvSpPr txBox="1"/>
+          <p:nvPr/>
+        </p:nvSpPr>
+        <p:spPr>
+          <a:xfrm>
+            <a:off x="457200" y="457200"/>
+            <a:ext cx="6858000" cy="4800600"/>
+          </a:xfrm>
+          <a:prstGeom prst="rect">
+            <a:avLst/>
+          </a:prstGeom>
+        </p:spPr>
+        <p:txBody>
+          <a:bodyPr wrap="square"/>
+          <a:lstStyle/>
+          <a:p>
+            <a:r>
+              <a:rPr lang="zh-CN" dirty="0"/>
+              <a:t>第 46 节 · 单元 8 验收复盘</a:t>
+            </a:r>
+          </a:p>
+          <a:p>
+            <a:r>
+              <a:rPr lang="zh-CN" dirty="0"/>
+              <a:t>单元 8 · 类 · W10</a:t>
+            </a:r>
+          </a:p>
+          <a:p>
+            <a:r>
+              <a:rPr lang="zh-CN" dirty="0"/>
+              <a:t/>
+            </a:r>
+          </a:p>
+          <a:p>
+            <a:r>
+              <a:rPr lang="zh-CN" dirty="0"/>
+              <a:t>学习目标：确认类、实例、继承、重写、组合都过关</a:t>
+            </a:r>
+          </a:p>
+          <a:p>
+            <a:r>
+              <a:rPr lang="zh-CN" dirty="0"/>
+              <a:t/>
+            </a:r>
+          </a:p>
+          <a:p>
+            <a:r>
+              <a:rPr lang="zh-CN" dirty="0"/>
+              <a:t>课堂实操（40 分钟，不看答案）：</a:t>
+            </a:r>
+          </a:p>
+          <a:p>
+            <a:r>
+              <a:rPr lang="zh-CN" dirty="0"/>
+              <a:t>· 逐条打勾验收自测</a:t>
+            </a:r>
+          </a:p>
+          <a:p>
+            <a:r>
+              <a:rPr lang="zh-CN" dirty="0"/>
+              <a:t>· 现场手写一个含继承的类</a:t>
+            </a:r>
+          </a:p>
+          <a:p>
+            <a:r>
+              <a:rPr lang="zh-CN" dirty="0"/>
+              <a:t/>
+            </a:r>
+          </a:p>
+          <a:p>
+            <a:r>
+              <a:rPr lang="zh-CN" dirty="0"/>
+              <a:t>课后作业：</a:t>
+            </a:r>
+          </a:p>
+          <a:p>
+            <a:r>
+              <a:rPr lang="zh-CN" dirty="0"/>
+              <a:t>· 完成本单元小结与产出检查</a:t>
+            </a:r>
+          </a:p>
+          <a:p>
+            <a:r>
+              <a:rPr lang="zh-CN" dirty="0"/>
+              <a:t/>
+            </a:r>
+          </a:p>
+          <a:p>
+            <a:r>
+              <a:rPr lang="zh-CN" dirty="0"/>
+              <a:t>节奏：讲 20 分钟 → 学员自己敲 40 分钟（不看答案）→ 对讲评自查 20 分钟 → 写作业 10 分钟。</a:t>
+            </a:r>
+          </a:p>
+        </p:txBody>
+      </p:sp>
+    </p:spTree>
+  </p:cSld>
+  <p:clrMapOvr>
+    <a:masterClrMapping/>
+  </p:clrMapOvr>
+</p:notes>
+</file>
+
+<file path=ppt/notesSlides/notesSlide15.xml><?xml version="1.0" encoding="utf-8"?>
+<p:notes xmlns:a="http://schemas.openxmlformats.org/drawingml/2006/main" xmlns:p="http://schemas.openxmlformats.org/presentationml/2006/main" xmlns:r="http://schemas.openxmlformats.org/officeDocument/2006/relationships">
+  <p:cSld>
+    <p:spTree>
+      <p:nvGrpSpPr>
+        <p:cNvPr id="1" name=""/>
+        <p:cNvGrpSpPr/>
+        <p:nvPr/>
+      </p:nvGrpSpPr>
+      <p:grpSpPr>
+        <a:xfrm>
+          <a:off x="0" y="0"/>
+          <a:ext cx="0" cy="0"/>
+          <a:chOff x="0" y="0"/>
+          <a:chExt cx="0" cy="0"/>
+        </a:xfrm>
+      </p:grpSpPr>
+      <p:sp>
+        <p:nvSpPr>
+          <p:cNvPr id="2" name="讲课提示"/>
+          <p:cNvSpPr txBox="1"/>
+          <p:nvPr/>
+        </p:nvSpPr>
+        <p:spPr>
+          <a:xfrm>
+            <a:off x="457200" y="457200"/>
+            <a:ext cx="6858000" cy="4800600"/>
+          </a:xfrm>
+          <a:prstGeom prst="rect">
+            <a:avLst/>
+          </a:prstGeom>
+        </p:spPr>
+        <p:txBody>
+          <a:bodyPr wrap="square"/>
+          <a:lstStyle/>
+          <a:p>
+            <a:r>
+              <a:rPr lang="zh-CN" dirty="0"/>
+              <a:t>第 46 节 · 核心知识点：单元 8 验收复盘</a:t>
+            </a:r>
+          </a:p>
+          <a:p>
+            <a:r>
+              <a:rPr lang="zh-CN" dirty="0"/>
+              <a:t/>
+            </a:r>
+          </a:p>
+          <a:p>
+            <a:r>
+              <a:rPr lang="zh-CN" dirty="0"/>
+              <a:t>讲这一页时：先让学生说出上节课的结论，再逐块讲要点。</a:t>
+            </a:r>
+          </a:p>
+          <a:p>
+            <a:r>
+              <a:rPr lang="zh-CN" dirty="0"/>
+              <a:t>每讲完一块，问一句「这一步如果写错了，报错会长什么样？」——把错误提前讲。</a:t>
+            </a:r>
+          </a:p>
+          <a:p>
+            <a:r>
+              <a:rPr lang="zh-CN" dirty="0"/>
+              <a:t/>
+            </a:r>
+          </a:p>
+          <a:p>
+            <a:r>
+              <a:rPr lang="zh-CN" dirty="0"/>
+              <a:t>本节目标：确认类、实例、继承、重写、组合都过关</a:t>
+            </a:r>
+          </a:p>
+          <a:p>
+            <a:r>
+              <a:rPr lang="zh-CN" dirty="0"/>
+              <a:t/>
+            </a:r>
+          </a:p>
+          <a:p>
+            <a:r>
+              <a:rPr lang="zh-CN" dirty="0"/>
+              <a:t>看不到懂的地方，回讲义对应小节读一遍，再回来对着这页复述一次——能讲出来才算真懂。</a:t>
+            </a:r>
+          </a:p>
+        </p:txBody>
+      </p:sp>
+    </p:spTree>
+  </p:cSld>
+  <p:clrMapOvr>
+    <a:masterClrMapping/>
+  </p:clrMapOvr>
+</p:notes>
+</file>
+
+<file path=ppt/notesSlides/notesSlide16.xml><?xml version="1.0" encoding="utf-8"?>
+<p:notes xmlns:a="http://schemas.openxmlformats.org/drawingml/2006/main" xmlns:p="http://schemas.openxmlformats.org/presentationml/2006/main" xmlns:r="http://schemas.openxmlformats.org/officeDocument/2006/relationships">
+  <p:cSld>
+    <p:spTree>
+      <p:nvGrpSpPr>
+        <p:cNvPr id="1" name=""/>
+        <p:cNvGrpSpPr/>
+        <p:nvPr/>
+      </p:nvGrpSpPr>
+      <p:grpSpPr>
+        <a:xfrm>
+          <a:off x="0" y="0"/>
+          <a:ext cx="0" cy="0"/>
+          <a:chOff x="0" y="0"/>
+          <a:chExt cx="0" cy="0"/>
+        </a:xfrm>
+      </p:grpSpPr>
+      <p:sp>
+        <p:nvSpPr>
+          <p:cNvPr id="2" name="讲课提示"/>
+          <p:cNvSpPr txBox="1"/>
+          <p:nvPr/>
+        </p:nvSpPr>
+        <p:spPr>
+          <a:xfrm>
+            <a:off x="457200" y="457200"/>
+            <a:ext cx="6858000" cy="4800600"/>
+          </a:xfrm>
+          <a:prstGeom prst="rect">
+            <a:avLst/>
+          </a:prstGeom>
+        </p:spPr>
+        <p:txBody>
+          <a:bodyPr wrap="square"/>
+          <a:lstStyle/>
+          <a:p>
+            <a:r>
+              <a:rPr lang="zh-CN" dirty="0"/>
+              <a:t>单元 8 小结 · 单元 8 · 小结</a:t>
+            </a:r>
+          </a:p>
+          <a:p>
+            <a:r>
+              <a:rPr lang="zh-CN" dirty="0"/>
+              <a:t/>
+            </a:r>
+          </a:p>
+          <a:p>
+            <a:r>
+              <a:rPr lang="zh-CN" dirty="0"/>
+              <a:t>收尾动作：让学生合上讲义，口述本单元三个最重要的结论；说不出来的，回对应课节。</a:t>
+            </a:r>
+          </a:p>
+          <a:p>
+            <a:r>
+              <a:rPr lang="zh-CN" dirty="0"/>
+              <a:t>然后当场勾一遍本单元课节的「已完成」，没打勾的进下一单元前补掉。</a:t>
+            </a:r>
+          </a:p>
+        </p:txBody>
+      </p:sp>
+    </p:spTree>
+  </p:cSld>
+  <p:clrMapOvr>
+    <a:masterClrMapping/>
+  </p:clrMapOvr>
+</p:notes>
+</file>
+
+<file path=ppt/notesSlides/notesSlide2.xml><?xml version="1.0" encoding="utf-8"?>
+<p:notes xmlns:a="http://schemas.openxmlformats.org/drawingml/2006/main" xmlns:p="http://schemas.openxmlformats.org/presentationml/2006/main" xmlns:r="http://schemas.openxmlformats.org/officeDocument/2006/relationships">
+  <p:cSld>
+    <p:spTree>
+      <p:nvGrpSpPr>
+        <p:cNvPr id="1" name=""/>
+        <p:cNvGrpSpPr/>
+        <p:nvPr/>
+      </p:nvGrpSpPr>
+      <p:grpSpPr>
+        <a:xfrm>
+          <a:off x="0" y="0"/>
+          <a:ext cx="0" cy="0"/>
+          <a:chOff x="0" y="0"/>
+          <a:chExt cx="0" cy="0"/>
+        </a:xfrm>
+      </p:grpSpPr>
+      <p:sp>
+        <p:nvSpPr>
+          <p:cNvPr id="2" name="讲课提示"/>
+          <p:cNvSpPr txBox="1"/>
+          <p:nvPr/>
+        </p:nvSpPr>
+        <p:spPr>
+          <a:xfrm>
+            <a:off x="457200" y="457200"/>
+            <a:ext cx="6858000" cy="4800600"/>
+          </a:xfrm>
+          <a:prstGeom prst="rect">
+            <a:avLst/>
+          </a:prstGeom>
+        </p:spPr>
+        <p:txBody>
+          <a:bodyPr wrap="square"/>
+          <a:lstStyle/>
+          <a:p>
+            <a:r>
+              <a:rPr lang="zh-CN" dirty="0"/>
+              <a:t>第 40 节 · 类、实例与 self</a:t>
+            </a:r>
+          </a:p>
+          <a:p>
+            <a:r>
+              <a:rPr lang="zh-CN" dirty="0"/>
+              <a:t>单元 8 · 类 · W9</a:t>
+            </a:r>
+          </a:p>
+          <a:p>
+            <a:r>
+              <a:rPr lang="zh-CN" dirty="0"/>
+              <a:t/>
+            </a:r>
+          </a:p>
+          <a:p>
+            <a:r>
+              <a:rPr lang="zh-CN" dirty="0"/>
+              <a:t>学习目标：理解类是从「一堆变量」到「一类事物」，说清 self 指向谁</a:t>
+            </a:r>
+          </a:p>
+          <a:p>
+            <a:r>
+              <a:rPr lang="zh-CN" dirty="0"/>
+              <a:t/>
+            </a:r>
+          </a:p>
+          <a:p>
+            <a:r>
+              <a:rPr lang="zh-CN" dirty="0"/>
+              <a:t>课堂实操（40 分钟，不看答案）：</a:t>
+            </a:r>
+          </a:p>
+          <a:p>
+            <a:r>
+              <a:rPr lang="zh-CN" dirty="0"/>
+              <a:t>· 现场判断 self 是什么：实例本身，不是类</a:t>
+            </a:r>
+          </a:p>
+          <a:p>
+            <a:r>
+              <a:rPr lang="zh-CN" dirty="0"/>
+              <a:t>· 故意删掉 self 看报错</a:t>
+            </a:r>
+          </a:p>
+          <a:p>
+            <a:r>
+              <a:rPr lang="zh-CN" dirty="0"/>
+              <a:t/>
+            </a:r>
+          </a:p>
+          <a:p>
+            <a:r>
+              <a:rPr lang="zh-CN" dirty="0"/>
+              <a:t>课后作业：</a:t>
+            </a:r>
+          </a:p>
+          <a:p>
+            <a:r>
+              <a:rPr lang="zh-CN" dirty="0"/>
+              <a:t>· 完成动手练习 8-1</a:t>
+            </a:r>
+          </a:p>
+          <a:p>
+            <a:r>
+              <a:rPr lang="zh-CN" dirty="0"/>
+              <a:t/>
+            </a:r>
+          </a:p>
+          <a:p>
+            <a:r>
+              <a:rPr lang="zh-CN" dirty="0"/>
+              <a:t>节奏：讲 20 分钟 → 学员自己敲 40 分钟（不看答案）→ 对讲评自查 20 分钟 → 写作业 10 分钟。</a:t>
+            </a:r>
+          </a:p>
+        </p:txBody>
+      </p:sp>
+    </p:spTree>
+  </p:cSld>
+  <p:clrMapOvr>
+    <a:masterClrMapping/>
+  </p:clrMapOvr>
+</p:notes>
+</file>
+
+<file path=ppt/notesSlides/notesSlide3.xml><?xml version="1.0" encoding="utf-8"?>
+<p:notes xmlns:a="http://schemas.openxmlformats.org/drawingml/2006/main" xmlns:p="http://schemas.openxmlformats.org/presentationml/2006/main" xmlns:r="http://schemas.openxmlformats.org/officeDocument/2006/relationships">
+  <p:cSld>
+    <p:spTree>
+      <p:nvGrpSpPr>
+        <p:cNvPr id="1" name=""/>
+        <p:cNvGrpSpPr/>
+        <p:nvPr/>
+      </p:nvGrpSpPr>
+      <p:grpSpPr>
+        <a:xfrm>
+          <a:off x="0" y="0"/>
+          <a:ext cx="0" cy="0"/>
+          <a:chOff x="0" y="0"/>
+          <a:chExt cx="0" cy="0"/>
+        </a:xfrm>
+      </p:grpSpPr>
+      <p:sp>
+        <p:nvSpPr>
+          <p:cNvPr id="2" name="讲课提示"/>
+          <p:cNvSpPr txBox="1"/>
+          <p:nvPr/>
+        </p:nvSpPr>
+        <p:spPr>
+          <a:xfrm>
+            <a:off x="457200" y="457200"/>
+            <a:ext cx="6858000" cy="4800600"/>
+          </a:xfrm>
+          <a:prstGeom prst="rect">
+            <a:avLst/>
+          </a:prstGeom>
+        </p:spPr>
+        <p:txBody>
+          <a:bodyPr wrap="square"/>
+          <a:lstStyle/>
+          <a:p>
+            <a:r>
+              <a:rPr lang="zh-CN" dirty="0"/>
+              <a:t>第 40 节 · 核心知识点：类、实例与 self</a:t>
+            </a:r>
+          </a:p>
+          <a:p>
+            <a:r>
+              <a:rPr lang="zh-CN" dirty="0"/>
+              <a:t/>
+            </a:r>
+          </a:p>
+          <a:p>
+            <a:r>
+              <a:rPr lang="zh-CN" dirty="0"/>
+              <a:t>讲这一页时：先让学生说出上节课的结论，再逐块讲要点。</a:t>
+            </a:r>
+          </a:p>
+          <a:p>
+            <a:r>
+              <a:rPr lang="zh-CN" dirty="0"/>
+              <a:t>每讲完一块，问一句「这一步如果写错了，报错会长什么样？」——把错误提前讲。</a:t>
+            </a:r>
+          </a:p>
+          <a:p>
+            <a:r>
+              <a:rPr lang="zh-CN" dirty="0"/>
+              <a:t/>
+            </a:r>
+          </a:p>
+          <a:p>
+            <a:r>
+              <a:rPr lang="zh-CN" dirty="0"/>
+              <a:t>本节目标：理解类是从「一堆变量」到「一类事物」，说清 self 指向谁</a:t>
+            </a:r>
+          </a:p>
+          <a:p>
+            <a:r>
+              <a:rPr lang="zh-CN" dirty="0"/>
+              <a:t/>
+            </a:r>
+          </a:p>
+          <a:p>
+            <a:r>
+              <a:rPr lang="zh-CN" dirty="0"/>
+              <a:t>看不到懂的地方，回讲义对应小节读一遍，再回来对着这页复述一次——能讲出来才算真懂。</a:t>
+            </a:r>
+          </a:p>
+        </p:txBody>
+      </p:sp>
+    </p:spTree>
+  </p:cSld>
+  <p:clrMapOvr>
+    <a:masterClrMapping/>
+  </p:clrMapOvr>
+</p:notes>
+</file>
+
+<file path=ppt/notesSlides/notesSlide4.xml><?xml version="1.0" encoding="utf-8"?>
+<p:notes xmlns:a="http://schemas.openxmlformats.org/drawingml/2006/main" xmlns:p="http://schemas.openxmlformats.org/presentationml/2006/main" xmlns:r="http://schemas.openxmlformats.org/officeDocument/2006/relationships">
+  <p:cSld>
+    <p:spTree>
+      <p:nvGrpSpPr>
+        <p:cNvPr id="1" name=""/>
+        <p:cNvGrpSpPr/>
+        <p:nvPr/>
+      </p:nvGrpSpPr>
+      <p:grpSpPr>
+        <a:xfrm>
+          <a:off x="0" y="0"/>
+          <a:ext cx="0" cy="0"/>
+          <a:chOff x="0" y="0"/>
+          <a:chExt cx="0" cy="0"/>
+        </a:xfrm>
+      </p:grpSpPr>
+      <p:sp>
+        <p:nvSpPr>
+          <p:cNvPr id="2" name="讲课提示"/>
+          <p:cNvSpPr txBox="1"/>
+          <p:nvPr/>
+        </p:nvSpPr>
+        <p:spPr>
+          <a:xfrm>
+            <a:off x="457200" y="457200"/>
+            <a:ext cx="6858000" cy="4800600"/>
+          </a:xfrm>
+          <a:prstGeom prst="rect">
+            <a:avLst/>
+          </a:prstGeom>
+        </p:spPr>
+        <p:txBody>
+          <a:bodyPr wrap="square"/>
+          <a:lstStyle/>
+          <a:p>
+            <a:r>
+              <a:rPr lang="zh-CN" dirty="0"/>
+              <a:t>第 41 节 · __init__、属性方法与 __str__</a:t>
+            </a:r>
+          </a:p>
+          <a:p>
+            <a:r>
+              <a:rPr lang="zh-CN" dirty="0"/>
+              <a:t>单元 8 · 类 · W9</a:t>
+            </a:r>
+          </a:p>
+          <a:p>
+            <a:r>
+              <a:rPr lang="zh-CN" dirty="0"/>
+              <a:t/>
+            </a:r>
+          </a:p>
+          <a:p>
+            <a:r>
+              <a:rPr lang="zh-CN" dirty="0"/>
+              <a:t>学习目标：掌握对象的出生证明，能用 __str__ 让对象打印得可读</a:t>
+            </a:r>
+          </a:p>
+          <a:p>
+            <a:r>
+              <a:rPr lang="zh-CN" dirty="0"/>
+              <a:t/>
+            </a:r>
+          </a:p>
+          <a:p>
+            <a:r>
+              <a:rPr lang="zh-CN" dirty="0"/>
+              <a:t>课堂实操（40 分钟，不看答案）：</a:t>
+            </a:r>
+          </a:p>
+          <a:p>
+            <a:r>
+              <a:rPr lang="zh-CN" dirty="0"/>
+              <a:t>· 给类加 __str__ 前后各打印一次比较效果</a:t>
+            </a:r>
+          </a:p>
+          <a:p>
+            <a:r>
+              <a:rPr lang="zh-CN" dirty="0"/>
+              <a:t>· 现场区分属性和方法</a:t>
+            </a:r>
+          </a:p>
+          <a:p>
+            <a:r>
+              <a:rPr lang="zh-CN" dirty="0"/>
+              <a:t/>
+            </a:r>
+          </a:p>
+          <a:p>
+            <a:r>
+              <a:rPr lang="zh-CN" dirty="0"/>
+              <a:t>课后作业：</a:t>
+            </a:r>
+          </a:p>
+          <a:p>
+            <a:r>
+              <a:rPr lang="zh-CN" dirty="0"/>
+              <a:t>· 完成动手练习 8-2 ~ 8-3</a:t>
+            </a:r>
+          </a:p>
+          <a:p>
+            <a:r>
+              <a:rPr lang="zh-CN" dirty="0"/>
+              <a:t/>
+            </a:r>
+          </a:p>
+          <a:p>
+            <a:r>
+              <a:rPr lang="zh-CN" dirty="0"/>
+              <a:t>节奏：讲 20 分钟 → 学员自己敲 40 分钟（不看答案）→ 对讲评自查 20 分钟 → 写作业 10 分钟。</a:t>
+            </a:r>
+          </a:p>
+        </p:txBody>
+      </p:sp>
+    </p:spTree>
+  </p:cSld>
+  <p:clrMapOvr>
+    <a:masterClrMapping/>
+  </p:clrMapOvr>
+</p:notes>
+</file>
+
+<file path=ppt/notesSlides/notesSlide5.xml><?xml version="1.0" encoding="utf-8"?>
+<p:notes xmlns:a="http://schemas.openxmlformats.org/drawingml/2006/main" xmlns:p="http://schemas.openxmlformats.org/presentationml/2006/main" xmlns:r="http://schemas.openxmlformats.org/officeDocument/2006/relationships">
+  <p:cSld>
+    <p:spTree>
+      <p:nvGrpSpPr>
+        <p:cNvPr id="1" name=""/>
+        <p:cNvGrpSpPr/>
+        <p:nvPr/>
+      </p:nvGrpSpPr>
+      <p:grpSpPr>
+        <a:xfrm>
+          <a:off x="0" y="0"/>
+          <a:ext cx="0" cy="0"/>
+          <a:chOff x="0" y="0"/>
+          <a:chExt cx="0" cy="0"/>
+        </a:xfrm>
+      </p:grpSpPr>
+      <p:sp>
+        <p:nvSpPr>
+          <p:cNvPr id="2" name="讲课提示"/>
+          <p:cNvSpPr txBox="1"/>
+          <p:nvPr/>
+        </p:nvSpPr>
+        <p:spPr>
+          <a:xfrm>
+            <a:off x="457200" y="457200"/>
+            <a:ext cx="6858000" cy="4800600"/>
+          </a:xfrm>
+          <a:prstGeom prst="rect">
+            <a:avLst/>
+          </a:prstGeom>
+        </p:spPr>
+        <p:txBody>
+          <a:bodyPr wrap="square"/>
+          <a:lstStyle/>
+          <a:p>
+            <a:r>
+              <a:rPr lang="zh-CN" dirty="0"/>
+              <a:t>第 41 节 · 核心知识点：__init__、属性方法与 __str__</a:t>
+            </a:r>
+          </a:p>
+          <a:p>
+            <a:r>
+              <a:rPr lang="zh-CN" dirty="0"/>
+              <a:t/>
+            </a:r>
+          </a:p>
+          <a:p>
+            <a:r>
+              <a:rPr lang="zh-CN" dirty="0"/>
+              <a:t>讲这一页时：先让学生说出上节课的结论，再逐块讲要点。</a:t>
+            </a:r>
+          </a:p>
+          <a:p>
+            <a:r>
+              <a:rPr lang="zh-CN" dirty="0"/>
+              <a:t>每讲完一块，问一句「这一步如果写错了，报错会长什么样？」——把错误提前讲。</a:t>
+            </a:r>
+          </a:p>
+          <a:p>
+            <a:r>
+              <a:rPr lang="zh-CN" dirty="0"/>
+              <a:t/>
+            </a:r>
+          </a:p>
+          <a:p>
+            <a:r>
+              <a:rPr lang="zh-CN" dirty="0"/>
+              <a:t>本节目标：掌握对象的出生证明，能用 __str__ 让对象打印得可读</a:t>
+            </a:r>
+          </a:p>
+          <a:p>
+            <a:r>
+              <a:rPr lang="zh-CN" dirty="0"/>
+              <a:t/>
+            </a:r>
+          </a:p>
+          <a:p>
+            <a:r>
+              <a:rPr lang="zh-CN" dirty="0"/>
+              <a:t>看不到懂的地方，回讲义对应小节读一遍，再回来对着这页复述一次——能讲出来才算真懂。</a:t>
+            </a:r>
+          </a:p>
+        </p:txBody>
+      </p:sp>
+    </p:spTree>
+  </p:cSld>
+  <p:clrMapOvr>
+    <a:masterClrMapping/>
+  </p:clrMapOvr>
+</p:notes>
+</file>
+
+<file path=ppt/notesSlides/notesSlide6.xml><?xml version="1.0" encoding="utf-8"?>
+<p:notes xmlns:a="http://schemas.openxmlformats.org/drawingml/2006/main" xmlns:p="http://schemas.openxmlformats.org/presentationml/2006/main" xmlns:r="http://schemas.openxmlformats.org/officeDocument/2006/relationships">
+  <p:cSld>
+    <p:spTree>
+      <p:nvGrpSpPr>
+        <p:cNvPr id="1" name=""/>
+        <p:cNvGrpSpPr/>
+        <p:nvPr/>
+      </p:nvGrpSpPr>
+      <p:grpSpPr>
+        <a:xfrm>
+          <a:off x="0" y="0"/>
+          <a:ext cx="0" cy="0"/>
+          <a:chOff x="0" y="0"/>
+          <a:chExt cx="0" cy="0"/>
+        </a:xfrm>
+      </p:grpSpPr>
+      <p:sp>
+        <p:nvSpPr>
+          <p:cNvPr id="2" name="讲课提示"/>
+          <p:cNvSpPr txBox="1"/>
+          <p:nvPr/>
+        </p:nvSpPr>
+        <p:spPr>
+          <a:xfrm>
+            <a:off x="457200" y="457200"/>
+            <a:ext cx="6858000" cy="4800600"/>
+          </a:xfrm>
+          <a:prstGeom prst="rect">
+            <a:avLst/>
+          </a:prstGeom>
+        </p:spPr>
+        <p:txBody>
+          <a:bodyPr wrap="square"/>
+          <a:lstStyle/>
+          <a:p>
+            <a:r>
+              <a:rPr lang="zh-CN" dirty="0"/>
+              <a:t>第 42 节 · 继承与方法重写</a:t>
+            </a:r>
+          </a:p>
+          <a:p>
+            <a:r>
+              <a:rPr lang="zh-CN" dirty="0"/>
+              <a:t>单元 8 · 类 · W10</a:t>
+            </a:r>
+          </a:p>
+          <a:p>
+            <a:r>
+              <a:rPr lang="zh-CN" dirty="0"/>
+              <a:t/>
+            </a:r>
+          </a:p>
+          <a:p>
+            <a:r>
+              <a:rPr lang="zh-CN" dirty="0"/>
+              <a:t>学习目标：会用 super().__init__()，理解重写与多态</a:t>
+            </a:r>
+          </a:p>
+          <a:p>
+            <a:r>
+              <a:rPr lang="zh-CN" dirty="0"/>
+              <a:t/>
+            </a:r>
+          </a:p>
+          <a:p>
+            <a:r>
+              <a:rPr lang="zh-CN" dirty="0"/>
+              <a:t>课堂实操（40 分钟，不看答案）：</a:t>
+            </a:r>
+          </a:p>
+          <a:p>
+            <a:r>
+              <a:rPr lang="zh-CN" dirty="0"/>
+              <a:t>· 现场演示子类忘记 super() 会怎样</a:t>
+            </a:r>
+          </a:p>
+          <a:p>
+            <a:r>
+              <a:rPr lang="zh-CN" dirty="0"/>
+              <a:t>· 把 Dog 和 Car 改成继承关系</a:t>
+            </a:r>
+          </a:p>
+          <a:p>
+            <a:r>
+              <a:rPr lang="zh-CN" dirty="0"/>
+              <a:t/>
+            </a:r>
+          </a:p>
+          <a:p>
+            <a:r>
+              <a:rPr lang="zh-CN" dirty="0"/>
+              <a:t>课后作业：</a:t>
+            </a:r>
+          </a:p>
+          <a:p>
+            <a:r>
+              <a:rPr lang="zh-CN" dirty="0"/>
+              <a:t>· 完成动手练习 8-4 ~ 8-6</a:t>
+            </a:r>
+          </a:p>
+          <a:p>
+            <a:r>
+              <a:rPr lang="zh-CN" dirty="0"/>
+              <a:t/>
+            </a:r>
+          </a:p>
+          <a:p>
+            <a:r>
+              <a:rPr lang="zh-CN" dirty="0"/>
+              <a:t>节奏：讲 20 分钟 → 学员自己敲 40 分钟（不看答案）→ 对讲评自查 20 分钟 → 写作业 10 分钟。</a:t>
+            </a:r>
+          </a:p>
+        </p:txBody>
+      </p:sp>
+    </p:spTree>
+  </p:cSld>
+  <p:clrMapOvr>
+    <a:masterClrMapping/>
+  </p:clrMapOvr>
+</p:notes>
+</file>
+
+<file path=ppt/notesSlides/notesSlide7.xml><?xml version="1.0" encoding="utf-8"?>
+<p:notes xmlns:a="http://schemas.openxmlformats.org/drawingml/2006/main" xmlns:p="http://schemas.openxmlformats.org/presentationml/2006/main" xmlns:r="http://schemas.openxmlformats.org/officeDocument/2006/relationships">
+  <p:cSld>
+    <p:spTree>
+      <p:nvGrpSpPr>
+        <p:cNvPr id="1" name=""/>
+        <p:cNvGrpSpPr/>
+        <p:nvPr/>
+      </p:nvGrpSpPr>
+      <p:grpSpPr>
+        <a:xfrm>
+          <a:off x="0" y="0"/>
+          <a:ext cx="0" cy="0"/>
+          <a:chOff x="0" y="0"/>
+          <a:chExt cx="0" cy="0"/>
+        </a:xfrm>
+      </p:grpSpPr>
+      <p:sp>
+        <p:nvSpPr>
+          <p:cNvPr id="2" name="讲课提示"/>
+          <p:cNvSpPr txBox="1"/>
+          <p:nvPr/>
+        </p:nvSpPr>
+        <p:spPr>
+          <a:xfrm>
+            <a:off x="457200" y="457200"/>
+            <a:ext cx="6858000" cy="4800600"/>
+          </a:xfrm>
+          <a:prstGeom prst="rect">
+            <a:avLst/>
+          </a:prstGeom>
+        </p:spPr>
+        <p:txBody>
+          <a:bodyPr wrap="square"/>
+          <a:lstStyle/>
+          <a:p>
+            <a:r>
+              <a:rPr lang="zh-CN" dirty="0"/>
+              <a:t>第 42 节 · 核心知识点：继承与方法重写</a:t>
+            </a:r>
+          </a:p>
+          <a:p>
+            <a:r>
+              <a:rPr lang="zh-CN" dirty="0"/>
+              <a:t/>
+            </a:r>
+          </a:p>
+          <a:p>
+            <a:r>
+              <a:rPr lang="zh-CN" dirty="0"/>
+              <a:t>讲这一页时：先让学生说出上节课的结论，再逐块讲要点。</a:t>
+            </a:r>
+          </a:p>
+          <a:p>
+            <a:r>
+              <a:rPr lang="zh-CN" dirty="0"/>
+              <a:t>每讲完一块，问一句「这一步如果写错了，报错会长什么样？」——把错误提前讲。</a:t>
+            </a:r>
+          </a:p>
+          <a:p>
+            <a:r>
+              <a:rPr lang="zh-CN" dirty="0"/>
+              <a:t/>
+            </a:r>
+          </a:p>
+          <a:p>
+            <a:r>
+              <a:rPr lang="zh-CN" dirty="0"/>
+              <a:t>本节目标：会用 super().__init__()，理解重写与多态</a:t>
+            </a:r>
+          </a:p>
+          <a:p>
+            <a:r>
+              <a:rPr lang="zh-CN" dirty="0"/>
+              <a:t/>
+            </a:r>
+          </a:p>
+          <a:p>
+            <a:r>
+              <a:rPr lang="zh-CN" dirty="0"/>
+              <a:t>看不到懂的地方，回讲义对应小节读一遍，再回来对着这页复述一次——能讲出来才算真懂。</a:t>
+            </a:r>
+          </a:p>
+        </p:txBody>
+      </p:sp>
+    </p:spTree>
+  </p:cSld>
+  <p:clrMapOvr>
+    <a:masterClrMapping/>
+  </p:clrMapOvr>
+</p:notes>
+</file>
+
+<file path=ppt/notesSlides/notesSlide8.xml><?xml version="1.0" encoding="utf-8"?>
+<p:notes xmlns:a="http://schemas.openxmlformats.org/drawingml/2006/main" xmlns:p="http://schemas.openxmlformats.org/presentationml/2006/main" xmlns:r="http://schemas.openxmlformats.org/officeDocument/2006/relationships">
+  <p:cSld>
+    <p:spTree>
+      <p:nvGrpSpPr>
+        <p:cNvPr id="1" name=""/>
+        <p:cNvGrpSpPr/>
+        <p:nvPr/>
+      </p:nvGrpSpPr>
+      <p:grpSpPr>
+        <a:xfrm>
+          <a:off x="0" y="0"/>
+          <a:ext cx="0" cy="0"/>
+          <a:chOff x="0" y="0"/>
+          <a:chExt cx="0" cy="0"/>
+        </a:xfrm>
+      </p:grpSpPr>
+      <p:sp>
+        <p:nvSpPr>
+          <p:cNvPr id="2" name="讲课提示"/>
+          <p:cNvSpPr txBox="1"/>
+          <p:nvPr/>
+        </p:nvSpPr>
+        <p:spPr>
+          <a:xfrm>
+            <a:off x="457200" y="457200"/>
+            <a:ext cx="6858000" cy="4800600"/>
+          </a:xfrm>
+          <a:prstGeom prst="rect">
+            <a:avLst/>
+          </a:prstGeom>
+        </p:spPr>
+        <p:txBody>
+          <a:bodyPr wrap="square"/>
+          <a:lstStyle/>
+          <a:p>
+            <a:r>
+              <a:rPr lang="zh-CN" dirty="0"/>
+              <a:t>第 43 节 · 类的组合与示例串讲</a:t>
+            </a:r>
+          </a:p>
+          <a:p>
+            <a:r>
+              <a:rPr lang="zh-CN" dirty="0"/>
+              <a:t>单元 8 · 类 · W10</a:t>
+            </a:r>
+          </a:p>
+          <a:p>
+            <a:r>
+              <a:rPr lang="zh-CN" dirty="0"/>
+              <a:t/>
+            </a:r>
+          </a:p>
+          <a:p>
+            <a:r>
+              <a:rPr lang="zh-CN" dirty="0"/>
+              <a:t>学习目标：能用组合代替继承，理解何时该用组合、何时该用继承</a:t>
+            </a:r>
+          </a:p>
+          <a:p>
+            <a:r>
+              <a:rPr lang="zh-CN" dirty="0"/>
+              <a:t/>
+            </a:r>
+          </a:p>
+          <a:p>
+            <a:r>
+              <a:rPr lang="zh-CN" dirty="0"/>
+              <a:t>课堂实操（40 分钟，不看答案）：</a:t>
+            </a:r>
+          </a:p>
+          <a:p>
+            <a:r>
+              <a:rPr lang="zh-CN" dirty="0"/>
+              <a:t>· 把三个类改成组合结构</a:t>
+            </a:r>
+          </a:p>
+          <a:p>
+            <a:r>
+              <a:rPr lang="zh-CN" dirty="0"/>
+              <a:t>· 对照示例讲清类设计的取舍</a:t>
+            </a:r>
+          </a:p>
+          <a:p>
+            <a:r>
+              <a:rPr lang="zh-CN" dirty="0"/>
+              <a:t/>
+            </a:r>
+          </a:p>
+          <a:p>
+            <a:r>
+              <a:rPr lang="zh-CN" dirty="0"/>
+              <a:t>课后作业：</a:t>
+            </a:r>
+          </a:p>
+          <a:p>
+            <a:r>
+              <a:rPr lang="zh-CN" dirty="0"/>
+              <a:t>· 完成动手练习进阶档 8-7 ~ 8-8</a:t>
+            </a:r>
+          </a:p>
+          <a:p>
+            <a:r>
+              <a:rPr lang="zh-CN" dirty="0"/>
+              <a:t/>
+            </a:r>
+          </a:p>
+          <a:p>
+            <a:r>
+              <a:rPr lang="zh-CN" dirty="0"/>
+              <a:t>节奏：讲 20 分钟 → 学员自己敲 40 分钟（不看答案）→ 对讲评自查 20 分钟 → 写作业 10 分钟。</a:t>
+            </a:r>
+          </a:p>
+        </p:txBody>
+      </p:sp>
+    </p:spTree>
+  </p:cSld>
+  <p:clrMapOvr>
+    <a:masterClrMapping/>
+  </p:clrMapOvr>
+</p:notes>
+</file>
+
+<file path=ppt/notesSlides/notesSlide9.xml><?xml version="1.0" encoding="utf-8"?>
+<p:notes xmlns:a="http://schemas.openxmlformats.org/drawingml/2006/main" xmlns:p="http://schemas.openxmlformats.org/presentationml/2006/main" xmlns:r="http://schemas.openxmlformats.org/officeDocument/2006/relationships">
+  <p:cSld>
+    <p:spTree>
+      <p:nvGrpSpPr>
+        <p:cNvPr id="1" name=""/>
+        <p:cNvGrpSpPr/>
+        <p:nvPr/>
+      </p:nvGrpSpPr>
+      <p:grpSpPr>
+        <a:xfrm>
+          <a:off x="0" y="0"/>
+          <a:ext cx="0" cy="0"/>
+          <a:chOff x="0" y="0"/>
+          <a:chExt cx="0" cy="0"/>
+        </a:xfrm>
+      </p:grpSpPr>
+      <p:sp>
+        <p:nvSpPr>
+          <p:cNvPr id="2" name="讲课提示"/>
+          <p:cNvSpPr txBox="1"/>
+          <p:nvPr/>
+        </p:nvSpPr>
+        <p:spPr>
+          <a:xfrm>
+            <a:off x="457200" y="457200"/>
+            <a:ext cx="6858000" cy="4800600"/>
+          </a:xfrm>
+          <a:prstGeom prst="rect">
+            <a:avLst/>
+          </a:prstGeom>
+        </p:spPr>
+        <p:txBody>
+          <a:bodyPr wrap="square"/>
+          <a:lstStyle/>
+          <a:p>
+            <a:r>
+              <a:rPr lang="zh-CN" dirty="0"/>
+              <a:t>第 43 节 · 核心知识点：类的组合与示例串讲</a:t>
+            </a:r>
+          </a:p>
+          <a:p>
+            <a:r>
+              <a:rPr lang="zh-CN" dirty="0"/>
+              <a:t/>
+            </a:r>
+          </a:p>
+          <a:p>
+            <a:r>
+              <a:rPr lang="zh-CN" dirty="0"/>
+              <a:t>讲这一页时：先让学生说出上节课的结论，再逐块讲要点。</a:t>
+            </a:r>
+          </a:p>
+          <a:p>
+            <a:r>
+              <a:rPr lang="zh-CN" dirty="0"/>
+              <a:t>每讲完一块，问一句「这一步如果写错了，报错会长什么样？」——把错误提前讲。</a:t>
+            </a:r>
+          </a:p>
+          <a:p>
+            <a:r>
+              <a:rPr lang="zh-CN" dirty="0"/>
+              <a:t/>
+            </a:r>
+          </a:p>
+          <a:p>
+            <a:r>
+              <a:rPr lang="zh-CN" dirty="0"/>
+              <a:t>本节目标：能用组合代替继承，理解何时该用组合、何时该用继承</a:t>
+            </a:r>
+          </a:p>
+          <a:p>
+            <a:r>
+              <a:rPr lang="zh-CN" dirty="0"/>
+              <a:t/>
+            </a:r>
+          </a:p>
+          <a:p>
+            <a:r>
+              <a:rPr lang="zh-CN" dirty="0"/>
+              <a:t>看不到懂的地方，回讲义对应小节读一遍，再回来对着这页复述一次——能讲出来才算真懂。</a:t>
+            </a:r>
+          </a:p>
+        </p:txBody>
+      </p:sp>
+    </p:spTree>
+  </p:cSld>
+  <p:clrMapOvr>
+    <a:masterClrMapping/>
+  </p:clrMapOvr>
+</p:notes>
 </file>
 
 <file path=ppt/slideLayouts/slideLayout1.xml><?xml version="1.0" encoding="utf-8"?>
